--- a/Experiencia de Aprendizaje 1 - Fundamentos de AI Generativa y Prompt Engineering/Clase 1.2/Clase 1.2.pptx
+++ b/Experiencia de Aprendizaje 1 - Fundamentos de AI Generativa y Prompt Engineering/Clase 1.2/Clase 1.2.pptx
@@ -5,24 +5,26 @@
     <p:sldMasterId id="2147483648" r:id="rId1"/>
   </p:sldMasterIdLst>
   <p:notesMasterIdLst>
-    <p:notesMasterId r:id="rId17"/>
+    <p:notesMasterId r:id="rId19"/>
   </p:notesMasterIdLst>
   <p:sldIdLst>
     <p:sldId id="256" r:id="rId2"/>
     <p:sldId id="266" r:id="rId3"/>
     <p:sldId id="267" r:id="rId4"/>
-    <p:sldId id="270" r:id="rId5"/>
-    <p:sldId id="275" r:id="rId6"/>
-    <p:sldId id="276" r:id="rId7"/>
-    <p:sldId id="277" r:id="rId8"/>
-    <p:sldId id="278" r:id="rId9"/>
-    <p:sldId id="280" r:id="rId10"/>
-    <p:sldId id="268" r:id="rId11"/>
-    <p:sldId id="269" r:id="rId12"/>
-    <p:sldId id="271" r:id="rId13"/>
-    <p:sldId id="272" r:id="rId14"/>
-    <p:sldId id="273" r:id="rId15"/>
-    <p:sldId id="274" r:id="rId16"/>
+    <p:sldId id="283" r:id="rId5"/>
+    <p:sldId id="284" r:id="rId6"/>
+    <p:sldId id="270" r:id="rId7"/>
+    <p:sldId id="275" r:id="rId8"/>
+    <p:sldId id="276" r:id="rId9"/>
+    <p:sldId id="277" r:id="rId10"/>
+    <p:sldId id="278" r:id="rId11"/>
+    <p:sldId id="280" r:id="rId12"/>
+    <p:sldId id="268" r:id="rId13"/>
+    <p:sldId id="269" r:id="rId14"/>
+    <p:sldId id="271" r:id="rId15"/>
+    <p:sldId id="272" r:id="rId16"/>
+    <p:sldId id="273" r:id="rId17"/>
+    <p:sldId id="274" r:id="rId18"/>
   </p:sldIdLst>
   <p:sldSz cx="12192000" cy="6858000"/>
   <p:notesSz cx="6858000" cy="9144000"/>
@@ -223,7 +225,7 @@
           <a:p>
             <a:fld id="{87BDCB0C-69E9-4911-980B-989A824EA717}" type="datetimeFigureOut">
               <a:rPr lang="es-CL" smtClean="0"/>
-              <a:t>13-03-2026</a:t>
+              <a:t>16-03-2026</a:t>
             </a:fld>
             <a:endParaRPr lang="es-CL"/>
           </a:p>
@@ -519,6 +521,13 @@
           </p:nvPr>
         </p:nvSpPr>
         <p:spPr/>
+        <p:txBody>
+          <a:bodyPr/>
+          <a:lstStyle/>
+          <a:p>
+            <a:endParaRPr lang="es-CL"/>
+          </a:p>
+        </p:txBody>
       </p:sp>
       <p:sp>
         <p:nvSpPr>
@@ -556,7 +565,7 @@
           <a:p>
             <a:fld id="{2107F482-7FF7-4DD4-AE91-ACA70D5B43D5}" type="slidenum">
               <a:rPr lang="es-CL" smtClean="0"/>
-              <a:t>6</a:t>
+              <a:t>8</a:t>
             </a:fld>
             <a:endParaRPr lang="es-CL"/>
           </a:p>
@@ -615,6 +624,13 @@
           </p:nvPr>
         </p:nvSpPr>
         <p:spPr/>
+        <p:txBody>
+          <a:bodyPr/>
+          <a:lstStyle/>
+          <a:p>
+            <a:endParaRPr lang="es-CL"/>
+          </a:p>
+        </p:txBody>
       </p:sp>
       <p:sp>
         <p:nvSpPr>
@@ -664,7 +680,7 @@
           <a:p>
             <a:fld id="{2107F482-7FF7-4DD4-AE91-ACA70D5B43D5}" type="slidenum">
               <a:rPr lang="es-CL" smtClean="0"/>
-              <a:t>7</a:t>
+              <a:t>9</a:t>
             </a:fld>
             <a:endParaRPr lang="es-CL"/>
           </a:p>
@@ -723,6 +739,13 @@
           </p:nvPr>
         </p:nvSpPr>
         <p:spPr/>
+        <p:txBody>
+          <a:bodyPr/>
+          <a:lstStyle/>
+          <a:p>
+            <a:endParaRPr lang="es-CL"/>
+          </a:p>
+        </p:txBody>
       </p:sp>
       <p:sp>
         <p:nvSpPr>
@@ -772,7 +795,7 @@
           <a:p>
             <a:fld id="{2107F482-7FF7-4DD4-AE91-ACA70D5B43D5}" type="slidenum">
               <a:rPr lang="es-CL" smtClean="0"/>
-              <a:t>8</a:t>
+              <a:t>10</a:t>
             </a:fld>
             <a:endParaRPr lang="es-CL"/>
           </a:p>
@@ -819,6 +842,13 @@
           </p:nvPr>
         </p:nvSpPr>
         <p:spPr/>
+        <p:txBody>
+          <a:bodyPr/>
+          <a:lstStyle/>
+          <a:p>
+            <a:endParaRPr lang="es-CL"/>
+          </a:p>
+        </p:txBody>
       </p:sp>
       <p:sp>
         <p:nvSpPr>
@@ -856,7 +886,7 @@
           <a:p>
             <a:fld id="{2107F482-7FF7-4DD4-AE91-ACA70D5B43D5}" type="slidenum">
               <a:rPr lang="es-CL" smtClean="0"/>
-              <a:t>11</a:t>
+              <a:t>13</a:t>
             </a:fld>
             <a:endParaRPr lang="es-CL"/>
           </a:p>
@@ -915,6 +945,13 @@
           </p:nvPr>
         </p:nvSpPr>
         <p:spPr/>
+        <p:txBody>
+          <a:bodyPr/>
+          <a:lstStyle/>
+          <a:p>
+            <a:endParaRPr lang="es-CL"/>
+          </a:p>
+        </p:txBody>
       </p:sp>
       <p:sp>
         <p:nvSpPr>
@@ -964,7 +1001,7 @@
           <a:p>
             <a:fld id="{2107F482-7FF7-4DD4-AE91-ACA70D5B43D5}" type="slidenum">
               <a:rPr lang="es-CL" smtClean="0"/>
-              <a:t>12</a:t>
+              <a:t>14</a:t>
             </a:fld>
             <a:endParaRPr lang="es-CL"/>
           </a:p>
@@ -1023,6 +1060,13 @@
           </p:nvPr>
         </p:nvSpPr>
         <p:spPr/>
+        <p:txBody>
+          <a:bodyPr/>
+          <a:lstStyle/>
+          <a:p>
+            <a:endParaRPr lang="es-CL"/>
+          </a:p>
+        </p:txBody>
       </p:sp>
       <p:sp>
         <p:nvSpPr>
@@ -1072,7 +1116,7 @@
           <a:p>
             <a:fld id="{2107F482-7FF7-4DD4-AE91-ACA70D5B43D5}" type="slidenum">
               <a:rPr lang="es-CL" smtClean="0"/>
-              <a:t>13</a:t>
+              <a:t>15</a:t>
             </a:fld>
             <a:endParaRPr lang="es-CL"/>
           </a:p>
@@ -1131,6 +1175,13 @@
           </p:nvPr>
         </p:nvSpPr>
         <p:spPr/>
+        <p:txBody>
+          <a:bodyPr/>
+          <a:lstStyle/>
+          <a:p>
+            <a:endParaRPr lang="es-CL"/>
+          </a:p>
+        </p:txBody>
       </p:sp>
       <p:sp>
         <p:nvSpPr>
@@ -1180,7 +1231,7 @@
           <a:p>
             <a:fld id="{2107F482-7FF7-4DD4-AE91-ACA70D5B43D5}" type="slidenum">
               <a:rPr lang="es-CL" smtClean="0"/>
-              <a:t>14</a:t>
+              <a:t>16</a:t>
             </a:fld>
             <a:endParaRPr lang="es-CL"/>
           </a:p>
@@ -1239,6 +1290,13 @@
           </p:nvPr>
         </p:nvSpPr>
         <p:spPr/>
+        <p:txBody>
+          <a:bodyPr/>
+          <a:lstStyle/>
+          <a:p>
+            <a:endParaRPr lang="es-CL"/>
+          </a:p>
+        </p:txBody>
       </p:sp>
       <p:sp>
         <p:nvSpPr>
@@ -1288,7 +1346,7 @@
           <a:p>
             <a:fld id="{2107F482-7FF7-4DD4-AE91-ACA70D5B43D5}" type="slidenum">
               <a:rPr lang="es-CL" smtClean="0"/>
-              <a:t>15</a:t>
+              <a:t>17</a:t>
             </a:fld>
             <a:endParaRPr lang="es-CL"/>
           </a:p>
@@ -1456,7 +1514,7 @@
           <a:p>
             <a:fld id="{E8BDA46D-A1A7-4D05-A86A-5A57D57622A5}" type="datetimeFigureOut">
               <a:rPr lang="es-CL" smtClean="0"/>
-              <a:t>13-03-2026</a:t>
+              <a:t>16-03-2026</a:t>
             </a:fld>
             <a:endParaRPr lang="es-CL"/>
           </a:p>
@@ -1656,7 +1714,7 @@
           <a:p>
             <a:fld id="{E8BDA46D-A1A7-4D05-A86A-5A57D57622A5}" type="datetimeFigureOut">
               <a:rPr lang="es-CL" smtClean="0"/>
-              <a:t>13-03-2026</a:t>
+              <a:t>16-03-2026</a:t>
             </a:fld>
             <a:endParaRPr lang="es-CL"/>
           </a:p>
@@ -1866,7 +1924,7 @@
           <a:p>
             <a:fld id="{E8BDA46D-A1A7-4D05-A86A-5A57D57622A5}" type="datetimeFigureOut">
               <a:rPr lang="es-CL" smtClean="0"/>
-              <a:t>13-03-2026</a:t>
+              <a:t>16-03-2026</a:t>
             </a:fld>
             <a:endParaRPr lang="es-CL"/>
           </a:p>
@@ -2066,7 +2124,7 @@
           <a:p>
             <a:fld id="{E8BDA46D-A1A7-4D05-A86A-5A57D57622A5}" type="datetimeFigureOut">
               <a:rPr lang="es-CL" smtClean="0"/>
-              <a:t>13-03-2026</a:t>
+              <a:t>16-03-2026</a:t>
             </a:fld>
             <a:endParaRPr lang="es-CL"/>
           </a:p>
@@ -2342,7 +2400,7 @@
           <a:p>
             <a:fld id="{E8BDA46D-A1A7-4D05-A86A-5A57D57622A5}" type="datetimeFigureOut">
               <a:rPr lang="es-CL" smtClean="0"/>
-              <a:t>13-03-2026</a:t>
+              <a:t>16-03-2026</a:t>
             </a:fld>
             <a:endParaRPr lang="es-CL"/>
           </a:p>
@@ -2610,7 +2668,7 @@
           <a:p>
             <a:fld id="{E8BDA46D-A1A7-4D05-A86A-5A57D57622A5}" type="datetimeFigureOut">
               <a:rPr lang="es-CL" smtClean="0"/>
-              <a:t>13-03-2026</a:t>
+              <a:t>16-03-2026</a:t>
             </a:fld>
             <a:endParaRPr lang="es-CL"/>
           </a:p>
@@ -3025,7 +3083,7 @@
           <a:p>
             <a:fld id="{E8BDA46D-A1A7-4D05-A86A-5A57D57622A5}" type="datetimeFigureOut">
               <a:rPr lang="es-CL" smtClean="0"/>
-              <a:t>13-03-2026</a:t>
+              <a:t>16-03-2026</a:t>
             </a:fld>
             <a:endParaRPr lang="es-CL"/>
           </a:p>
@@ -3167,7 +3225,7 @@
           <a:p>
             <a:fld id="{E8BDA46D-A1A7-4D05-A86A-5A57D57622A5}" type="datetimeFigureOut">
               <a:rPr lang="es-CL" smtClean="0"/>
-              <a:t>13-03-2026</a:t>
+              <a:t>16-03-2026</a:t>
             </a:fld>
             <a:endParaRPr lang="es-CL"/>
           </a:p>
@@ -3280,7 +3338,7 @@
           <a:p>
             <a:fld id="{E8BDA46D-A1A7-4D05-A86A-5A57D57622A5}" type="datetimeFigureOut">
               <a:rPr lang="es-CL" smtClean="0"/>
-              <a:t>13-03-2026</a:t>
+              <a:t>16-03-2026</a:t>
             </a:fld>
             <a:endParaRPr lang="es-CL"/>
           </a:p>
@@ -3593,7 +3651,7 @@
           <a:p>
             <a:fld id="{E8BDA46D-A1A7-4D05-A86A-5A57D57622A5}" type="datetimeFigureOut">
               <a:rPr lang="es-CL" smtClean="0"/>
-              <a:t>13-03-2026</a:t>
+              <a:t>16-03-2026</a:t>
             </a:fld>
             <a:endParaRPr lang="es-CL"/>
           </a:p>
@@ -3882,7 +3940,7 @@
           <a:p>
             <a:fld id="{E8BDA46D-A1A7-4D05-A86A-5A57D57622A5}" type="datetimeFigureOut">
               <a:rPr lang="es-CL" smtClean="0"/>
-              <a:t>13-03-2026</a:t>
+              <a:t>16-03-2026</a:t>
             </a:fld>
             <a:endParaRPr lang="es-CL"/>
           </a:p>
@@ -4125,7 +4183,7 @@
           <a:p>
             <a:fld id="{E8BDA46D-A1A7-4D05-A86A-5A57D57622A5}" type="datetimeFigureOut">
               <a:rPr lang="es-CL" smtClean="0"/>
-              <a:t>13-03-2026</a:t>
+              <a:t>16-03-2026</a:t>
             </a:fld>
             <a:endParaRPr lang="es-CL"/>
           </a:p>
@@ -4889,7 +4947,7 @@
         <p:cNvPr id="1" name="">
           <a:extLst>
             <a:ext uri="{FF2B5EF4-FFF2-40B4-BE49-F238E27FC236}">
-              <a16:creationId xmlns:a16="http://schemas.microsoft.com/office/drawing/2014/main" id="{15F688FF-14EF-D369-96A0-A78B148A297B}"/>
+              <a16:creationId xmlns:a16="http://schemas.microsoft.com/office/drawing/2014/main" id="{9869FDF3-09BE-1AB8-3EC0-9C42158B4BF5}"/>
             </a:ext>
           </a:extLst>
         </p:cNvPr>
@@ -4904,60 +4962,12 @@
           <a:chExt cx="0" cy="0"/>
         </a:xfrm>
       </p:grpSpPr>
-      <p:sp>
-        <p:nvSpPr>
-          <p:cNvPr id="2" name="Título 1">
-            <a:extLst>
-              <a:ext uri="{FF2B5EF4-FFF2-40B4-BE49-F238E27FC236}">
-                <a16:creationId xmlns:a16="http://schemas.microsoft.com/office/drawing/2014/main" id="{471619C9-3C53-B17C-0F4A-2E607A64D21D}"/>
-              </a:ext>
-            </a:extLst>
-          </p:cNvPr>
-          <p:cNvSpPr>
-            <a:spLocks noGrp="1"/>
-          </p:cNvSpPr>
-          <p:nvPr>
-            <p:ph type="title"/>
-          </p:nvPr>
-        </p:nvSpPr>
-        <p:spPr>
-          <a:xfrm>
-            <a:off x="838200" y="2380435"/>
-            <a:ext cx="10515600" cy="1325563"/>
-          </a:xfrm>
-        </p:spPr>
-        <p:txBody>
-          <a:bodyPr>
-            <a:noAutofit/>
-          </a:bodyPr>
-          <a:lstStyle/>
-          <a:p>
-            <a:r>
-              <a:rPr lang="es-MX" sz="3600" b="1" i="1" dirty="0"/>
-              <a:t>Zero – </a:t>
-            </a:r>
-            <a:r>
-              <a:rPr lang="es-MX" sz="3600" b="1" i="1" dirty="0" err="1"/>
-              <a:t>Shot</a:t>
-            </a:r>
-            <a:r>
-              <a:rPr lang="es-MX" sz="3600" b="1" i="1" dirty="0"/>
-              <a:t> </a:t>
-            </a:r>
-            <a:r>
-              <a:rPr lang="es-CL" sz="3600" b="1" i="1" dirty="0" err="1"/>
-              <a:t>Prompting</a:t>
-            </a:r>
-            <a:endParaRPr lang="es-CL" sz="3600" b="1" i="1" dirty="0"/>
-          </a:p>
-        </p:txBody>
-      </p:sp>
       <p:pic>
         <p:nvPicPr>
           <p:cNvPr id="4" name="Picture 2" descr="Duoc UC - Learn Chile">
             <a:extLst>
               <a:ext uri="{FF2B5EF4-FFF2-40B4-BE49-F238E27FC236}">
-                <a16:creationId xmlns:a16="http://schemas.microsoft.com/office/drawing/2014/main" id="{7C9AD642-C65A-F352-B420-FE924CA930DC}"/>
+                <a16:creationId xmlns:a16="http://schemas.microsoft.com/office/drawing/2014/main" id="{72A8930F-1822-7455-B419-932B3D79124C}"/>
               </a:ext>
             </a:extLst>
           </p:cNvPr>
@@ -4967,7 +4977,7 @@
           <p:nvPr/>
         </p:nvPicPr>
         <p:blipFill>
-          <a:blip r:embed="rId2">
+          <a:blip r:embed="rId3">
             <a:extLst>
               <a:ext uri="{28A0092B-C50C-407E-A947-70E740481C1C}">
                 <a14:useLocalDpi xmlns:a14="http://schemas.microsoft.com/office/drawing/2010/main" val="0"/>
@@ -4999,51 +5009,54 @@
           </a:extLst>
         </p:spPr>
       </p:pic>
-      <p:sp>
-        <p:nvSpPr>
-          <p:cNvPr id="6" name="CuadroTexto 5">
-            <a:extLst>
-              <a:ext uri="{FF2B5EF4-FFF2-40B4-BE49-F238E27FC236}">
-                <a16:creationId xmlns:a16="http://schemas.microsoft.com/office/drawing/2014/main" id="{5A09965E-1AA7-4955-EA0B-59F1D1D0BE72}"/>
-              </a:ext>
-            </a:extLst>
-          </p:cNvPr>
-          <p:cNvSpPr txBox="1"/>
+      <p:cxnSp>
+        <p:nvCxnSpPr>
+          <p:cNvPr id="5" name="Conector recto de flecha 4">
+            <a:extLst>
+              <a:ext uri="{FF2B5EF4-FFF2-40B4-BE49-F238E27FC236}">
+                <a16:creationId xmlns:a16="http://schemas.microsoft.com/office/drawing/2014/main" id="{F00FB54E-34D5-66B4-CA62-2D6A3F706930}"/>
+              </a:ext>
+            </a:extLst>
+          </p:cNvPr>
+          <p:cNvCxnSpPr/>
           <p:nvPr/>
-        </p:nvSpPr>
+        </p:nvCxnSpPr>
         <p:spPr>
           <a:xfrm>
-            <a:off x="503358" y="6291699"/>
-            <a:ext cx="7604321" cy="276999"/>
-          </a:xfrm>
-          <a:prstGeom prst="rect">
+            <a:off x="4033520" y="3545840"/>
+            <a:ext cx="2611120" cy="1198880"/>
+          </a:xfrm>
+          <a:prstGeom prst="straightConnector1">
             <a:avLst/>
           </a:prstGeom>
-          <a:noFill/>
-        </p:spPr>
-        <p:txBody>
-          <a:bodyPr wrap="square">
-            <a:spAutoFit/>
-          </a:bodyPr>
-          <a:lstStyle/>
-          <a:p>
-            <a:r>
-              <a:rPr lang="es-CL" sz="1200" b="1" i="1" dirty="0"/>
-              <a:t>Nota:</a:t>
-            </a:r>
-            <a:r>
-              <a:rPr lang="es-CL" sz="1200" dirty="0"/>
-              <a:t> https://blog.langchain.com/few-shot-prompting-to-improve-tool-calling-performance/ </a:t>
-            </a:r>
-          </a:p>
-        </p:txBody>
-      </p:sp>
-      <p:sp>
-        <p:nvSpPr>
-          <p:cNvPr id="3" name="Título 1">
-            <a:extLst>
-              <a:ext uri="{FF2B5EF4-FFF2-40B4-BE49-F238E27FC236}">
-                <a16:creationId xmlns:a16="http://schemas.microsoft.com/office/drawing/2014/main" id="{F5681707-FFBC-C1EA-DF55-C85DF5E7A034}"/>
+          <a:ln w="38100">
+            <a:solidFill>
+              <a:schemeClr val="tx1"/>
+            </a:solidFill>
+            <a:tailEnd type="triangle"/>
+          </a:ln>
+        </p:spPr>
+        <p:style>
+          <a:lnRef idx="1">
+            <a:schemeClr val="accent1"/>
+          </a:lnRef>
+          <a:fillRef idx="0">
+            <a:schemeClr val="accent1"/>
+          </a:fillRef>
+          <a:effectRef idx="0">
+            <a:schemeClr val="accent1"/>
+          </a:effectRef>
+          <a:fontRef idx="minor">
+            <a:schemeClr val="tx1"/>
+          </a:fontRef>
+        </p:style>
+      </p:cxnSp>
+      <p:sp>
+        <p:nvSpPr>
+          <p:cNvPr id="6" name="Título 1">
+            <a:extLst>
+              <a:ext uri="{FF2B5EF4-FFF2-40B4-BE49-F238E27FC236}">
+                <a16:creationId xmlns:a16="http://schemas.microsoft.com/office/drawing/2014/main" id="{8089AB0F-C3E5-E4BD-55D8-E8A91BBA79F0}"/>
               </a:ext>
             </a:extLst>
           </p:cNvPr>
@@ -5054,8 +5067,8 @@
         </p:nvSpPr>
         <p:spPr>
           <a:xfrm>
-            <a:off x="5878113" y="993489"/>
-            <a:ext cx="5257800" cy="4025551"/>
+            <a:off x="6852920" y="4081938"/>
+            <a:ext cx="10515600" cy="1325563"/>
           </a:xfrm>
           <a:prstGeom prst="rect">
             <a:avLst/>
@@ -5086,6 +5099,478 @@
           </a:lstStyle>
           <a:p>
             <a:r>
+              <a:rPr lang="es-CL" sz="3600" i="1" dirty="0"/>
+              <a:t>¿Es la solución perfecta?</a:t>
+            </a:r>
+          </a:p>
+        </p:txBody>
+      </p:sp>
+      <p:sp>
+        <p:nvSpPr>
+          <p:cNvPr id="3" name="Título 1">
+            <a:extLst>
+              <a:ext uri="{FF2B5EF4-FFF2-40B4-BE49-F238E27FC236}">
+                <a16:creationId xmlns:a16="http://schemas.microsoft.com/office/drawing/2014/main" id="{B221EEEA-9C05-EEE1-C27E-326A96503126}"/>
+              </a:ext>
+            </a:extLst>
+          </p:cNvPr>
+          <p:cNvSpPr txBox="1">
+            <a:spLocks/>
+          </p:cNvSpPr>
+          <p:nvPr/>
+        </p:nvSpPr>
+        <p:spPr>
+          <a:xfrm>
+            <a:off x="7490874" y="4744719"/>
+            <a:ext cx="10515600" cy="1325563"/>
+          </a:xfrm>
+          <a:prstGeom prst="rect">
+            <a:avLst/>
+          </a:prstGeom>
+        </p:spPr>
+        <p:txBody>
+          <a:bodyPr vert="horz" lIns="91440" tIns="45720" rIns="91440" bIns="45720" rtlCol="0" anchor="ctr">
+            <a:noAutofit/>
+          </a:bodyPr>
+          <a:lstStyle>
+            <a:lvl1pPr algn="l" defTabSz="914400" rtl="0" eaLnBrk="1" latinLnBrk="0" hangingPunct="1">
+              <a:lnSpc>
+                <a:spcPct val="90000"/>
+              </a:lnSpc>
+              <a:spcBef>
+                <a:spcPct val="0"/>
+              </a:spcBef>
+              <a:buNone/>
+              <a:defRPr sz="4400" kern="1200">
+                <a:solidFill>
+                  <a:schemeClr val="tx1"/>
+                </a:solidFill>
+                <a:latin typeface="+mj-lt"/>
+                <a:ea typeface="+mj-ea"/>
+                <a:cs typeface="+mj-cs"/>
+              </a:defRPr>
+            </a:lvl1pPr>
+          </a:lstStyle>
+          <a:p>
+            <a:r>
+              <a:rPr lang="es-CL" sz="3600" i="1" dirty="0"/>
+              <a:t>No, pero ayuda.</a:t>
+            </a:r>
+          </a:p>
+        </p:txBody>
+      </p:sp>
+      <p:sp>
+        <p:nvSpPr>
+          <p:cNvPr id="10" name="Título 1">
+            <a:extLst>
+              <a:ext uri="{FF2B5EF4-FFF2-40B4-BE49-F238E27FC236}">
+                <a16:creationId xmlns:a16="http://schemas.microsoft.com/office/drawing/2014/main" id="{5EA02DBA-441B-1A94-F9CC-A494815C2334}"/>
+              </a:ext>
+            </a:extLst>
+          </p:cNvPr>
+          <p:cNvSpPr txBox="1">
+            <a:spLocks/>
+          </p:cNvSpPr>
+          <p:nvPr/>
+        </p:nvSpPr>
+        <p:spPr>
+          <a:xfrm>
+            <a:off x="691433" y="1912016"/>
+            <a:ext cx="10515600" cy="1325563"/>
+          </a:xfrm>
+          <a:prstGeom prst="rect">
+            <a:avLst/>
+          </a:prstGeom>
+        </p:spPr>
+        <p:txBody>
+          <a:bodyPr vert="horz" lIns="91440" tIns="45720" rIns="91440" bIns="45720" rtlCol="0" anchor="ctr">
+            <a:noAutofit/>
+          </a:bodyPr>
+          <a:lstStyle>
+            <a:lvl1pPr algn="l" defTabSz="914400" rtl="0" eaLnBrk="1" latinLnBrk="0" hangingPunct="1">
+              <a:lnSpc>
+                <a:spcPct val="90000"/>
+              </a:lnSpc>
+              <a:spcBef>
+                <a:spcPct val="0"/>
+              </a:spcBef>
+              <a:buNone/>
+              <a:defRPr sz="4400" kern="1200">
+                <a:solidFill>
+                  <a:schemeClr val="tx1"/>
+                </a:solidFill>
+                <a:latin typeface="+mj-lt"/>
+                <a:ea typeface="+mj-ea"/>
+                <a:cs typeface="+mj-cs"/>
+              </a:defRPr>
+            </a:lvl1pPr>
+          </a:lstStyle>
+          <a:p>
+            <a:r>
+              <a:rPr lang="es-CL" sz="4000" b="1" i="1"/>
+              <a:t>Prompt Engineering </a:t>
+            </a:r>
+            <a:r>
+              <a:rPr lang="es-CL" sz="3600" i="1"/>
+              <a:t>es una técnica para mejorar las respuestas de los modelos, buscando consistencia, reducción de alucinaciones y personalización de los LLMs.</a:t>
+            </a:r>
+            <a:endParaRPr lang="es-CL" sz="3600" i="1" dirty="0"/>
+          </a:p>
+        </p:txBody>
+      </p:sp>
+    </p:spTree>
+    <p:extLst>
+      <p:ext uri="{BB962C8B-B14F-4D97-AF65-F5344CB8AC3E}">
+        <p14:creationId xmlns:p14="http://schemas.microsoft.com/office/powerpoint/2010/main" val="4135010020"/>
+      </p:ext>
+    </p:extLst>
+  </p:cSld>
+  <p:clrMapOvr>
+    <a:masterClrMapping/>
+  </p:clrMapOvr>
+</p:sld>
+</file>
+
+<file path=ppt/slides/slide11.xml><?xml version="1.0" encoding="utf-8"?>
+<p:sld xmlns:a="http://schemas.openxmlformats.org/drawingml/2006/main" xmlns:r="http://schemas.openxmlformats.org/officeDocument/2006/relationships" xmlns:p="http://schemas.openxmlformats.org/presentationml/2006/main">
+  <p:cSld>
+    <p:spTree>
+      <p:nvGrpSpPr>
+        <p:cNvPr id="1" name="">
+          <a:extLst>
+            <a:ext uri="{FF2B5EF4-FFF2-40B4-BE49-F238E27FC236}">
+              <a16:creationId xmlns:a16="http://schemas.microsoft.com/office/drawing/2014/main" id="{57AA97FD-2191-E9AA-3D7F-CD2F37404C12}"/>
+            </a:ext>
+          </a:extLst>
+        </p:cNvPr>
+        <p:cNvGrpSpPr/>
+        <p:nvPr/>
+      </p:nvGrpSpPr>
+      <p:grpSpPr>
+        <a:xfrm>
+          <a:off x="0" y="0"/>
+          <a:ext cx="0" cy="0"/>
+          <a:chOff x="0" y="0"/>
+          <a:chExt cx="0" cy="0"/>
+        </a:xfrm>
+      </p:grpSpPr>
+      <p:sp>
+        <p:nvSpPr>
+          <p:cNvPr id="2" name="Título 1">
+            <a:extLst>
+              <a:ext uri="{FF2B5EF4-FFF2-40B4-BE49-F238E27FC236}">
+                <a16:creationId xmlns:a16="http://schemas.microsoft.com/office/drawing/2014/main" id="{4AA56AF0-4894-BD4E-ED99-0933E6ADF2C0}"/>
+              </a:ext>
+            </a:extLst>
+          </p:cNvPr>
+          <p:cNvSpPr>
+            <a:spLocks noGrp="1"/>
+          </p:cNvSpPr>
+          <p:nvPr>
+            <p:ph type="title"/>
+          </p:nvPr>
+        </p:nvSpPr>
+        <p:spPr>
+          <a:xfrm>
+            <a:off x="1351280" y="2471875"/>
+            <a:ext cx="10515600" cy="1325563"/>
+          </a:xfrm>
+        </p:spPr>
+        <p:txBody>
+          <a:bodyPr>
+            <a:noAutofit/>
+          </a:bodyPr>
+          <a:lstStyle/>
+          <a:p>
+            <a:r>
+              <a:rPr lang="es-CL" sz="3600" i="1" dirty="0"/>
+              <a:t>¿Cuáles son las técnicas de </a:t>
+            </a:r>
+            <a:r>
+              <a:rPr lang="es-CL" sz="3600" i="1" dirty="0" err="1"/>
+              <a:t>Prompt</a:t>
+            </a:r>
+            <a:r>
+              <a:rPr lang="es-CL" sz="3600" i="1" dirty="0"/>
+              <a:t> </a:t>
+            </a:r>
+            <a:r>
+              <a:rPr lang="es-CL" sz="3600" i="1" dirty="0" err="1"/>
+              <a:t>Engineering</a:t>
+            </a:r>
+            <a:r>
+              <a:rPr lang="es-CL" sz="3600" i="1" dirty="0"/>
+              <a:t>?</a:t>
+            </a:r>
+            <a:endParaRPr lang="es-CL" sz="3600" b="1" i="1" dirty="0"/>
+          </a:p>
+        </p:txBody>
+      </p:sp>
+      <p:pic>
+        <p:nvPicPr>
+          <p:cNvPr id="4" name="Picture 2" descr="Duoc UC - Learn Chile">
+            <a:extLst>
+              <a:ext uri="{FF2B5EF4-FFF2-40B4-BE49-F238E27FC236}">
+                <a16:creationId xmlns:a16="http://schemas.microsoft.com/office/drawing/2014/main" id="{F10E2652-E8AB-542F-F375-D5A600D6FC8F}"/>
+              </a:ext>
+            </a:extLst>
+          </p:cNvPr>
+          <p:cNvPicPr>
+            <a:picLocks noChangeAspect="1" noChangeArrowheads="1"/>
+          </p:cNvPicPr>
+          <p:nvPr/>
+        </p:nvPicPr>
+        <p:blipFill>
+          <a:blip r:embed="rId2">
+            <a:extLst>
+              <a:ext uri="{28A0092B-C50C-407E-A947-70E740481C1C}">
+                <a14:useLocalDpi xmlns:a14="http://schemas.microsoft.com/office/drawing/2010/main" val="0"/>
+              </a:ext>
+            </a:extLst>
+          </a:blip>
+          <a:srcRect/>
+          <a:stretch>
+            <a:fillRect/>
+          </a:stretch>
+        </p:blipFill>
+        <p:spPr bwMode="auto">
+          <a:xfrm>
+            <a:off x="11135913" y="30480"/>
+            <a:ext cx="974807" cy="825402"/>
+          </a:xfrm>
+          <a:prstGeom prst="rect">
+            <a:avLst/>
+          </a:prstGeom>
+          <a:noFill/>
+          <a:extLst>
+            <a:ext uri="{909E8E84-426E-40DD-AFC4-6F175D3DCCD1}">
+              <a14:hiddenFill xmlns:a14="http://schemas.microsoft.com/office/drawing/2010/main">
+                <a:solidFill>
+                  <a:srgbClr val="FFFFFF"/>
+                </a:solidFill>
+              </a14:hiddenFill>
+            </a:ext>
+          </a:extLst>
+        </p:spPr>
+      </p:pic>
+    </p:spTree>
+    <p:extLst>
+      <p:ext uri="{BB962C8B-B14F-4D97-AF65-F5344CB8AC3E}">
+        <p14:creationId xmlns:p14="http://schemas.microsoft.com/office/powerpoint/2010/main" val="2873179610"/>
+      </p:ext>
+    </p:extLst>
+  </p:cSld>
+  <p:clrMapOvr>
+    <a:masterClrMapping/>
+  </p:clrMapOvr>
+</p:sld>
+</file>
+
+<file path=ppt/slides/slide12.xml><?xml version="1.0" encoding="utf-8"?>
+<p:sld xmlns:a="http://schemas.openxmlformats.org/drawingml/2006/main" xmlns:r="http://schemas.openxmlformats.org/officeDocument/2006/relationships" xmlns:p="http://schemas.openxmlformats.org/presentationml/2006/main">
+  <p:cSld>
+    <p:spTree>
+      <p:nvGrpSpPr>
+        <p:cNvPr id="1" name="">
+          <a:extLst>
+            <a:ext uri="{FF2B5EF4-FFF2-40B4-BE49-F238E27FC236}">
+              <a16:creationId xmlns:a16="http://schemas.microsoft.com/office/drawing/2014/main" id="{15F688FF-14EF-D369-96A0-A78B148A297B}"/>
+            </a:ext>
+          </a:extLst>
+        </p:cNvPr>
+        <p:cNvGrpSpPr/>
+        <p:nvPr/>
+      </p:nvGrpSpPr>
+      <p:grpSpPr>
+        <a:xfrm>
+          <a:off x="0" y="0"/>
+          <a:ext cx="0" cy="0"/>
+          <a:chOff x="0" y="0"/>
+          <a:chExt cx="0" cy="0"/>
+        </a:xfrm>
+      </p:grpSpPr>
+      <p:sp>
+        <p:nvSpPr>
+          <p:cNvPr id="2" name="Título 1">
+            <a:extLst>
+              <a:ext uri="{FF2B5EF4-FFF2-40B4-BE49-F238E27FC236}">
+                <a16:creationId xmlns:a16="http://schemas.microsoft.com/office/drawing/2014/main" id="{471619C9-3C53-B17C-0F4A-2E607A64D21D}"/>
+              </a:ext>
+            </a:extLst>
+          </p:cNvPr>
+          <p:cNvSpPr>
+            <a:spLocks noGrp="1"/>
+          </p:cNvSpPr>
+          <p:nvPr>
+            <p:ph type="title"/>
+          </p:nvPr>
+        </p:nvSpPr>
+        <p:spPr>
+          <a:xfrm>
+            <a:off x="838200" y="2380435"/>
+            <a:ext cx="10515600" cy="1325563"/>
+          </a:xfrm>
+        </p:spPr>
+        <p:txBody>
+          <a:bodyPr>
+            <a:noAutofit/>
+          </a:bodyPr>
+          <a:lstStyle/>
+          <a:p>
+            <a:r>
+              <a:rPr lang="es-MX" sz="3600" b="1" i="1" dirty="0"/>
+              <a:t>Zero – </a:t>
+            </a:r>
+            <a:r>
+              <a:rPr lang="es-MX" sz="3600" b="1" i="1" dirty="0" err="1"/>
+              <a:t>Shot</a:t>
+            </a:r>
+            <a:r>
+              <a:rPr lang="es-MX" sz="3600" b="1" i="1" dirty="0"/>
+              <a:t> </a:t>
+            </a:r>
+            <a:r>
+              <a:rPr lang="es-CL" sz="3600" b="1" i="1" dirty="0" err="1"/>
+              <a:t>Prompting</a:t>
+            </a:r>
+            <a:endParaRPr lang="es-CL" sz="3600" b="1" i="1" dirty="0"/>
+          </a:p>
+        </p:txBody>
+      </p:sp>
+      <p:pic>
+        <p:nvPicPr>
+          <p:cNvPr id="4" name="Picture 2" descr="Duoc UC - Learn Chile">
+            <a:extLst>
+              <a:ext uri="{FF2B5EF4-FFF2-40B4-BE49-F238E27FC236}">
+                <a16:creationId xmlns:a16="http://schemas.microsoft.com/office/drawing/2014/main" id="{7C9AD642-C65A-F352-B420-FE924CA930DC}"/>
+              </a:ext>
+            </a:extLst>
+          </p:cNvPr>
+          <p:cNvPicPr>
+            <a:picLocks noChangeAspect="1" noChangeArrowheads="1"/>
+          </p:cNvPicPr>
+          <p:nvPr/>
+        </p:nvPicPr>
+        <p:blipFill>
+          <a:blip r:embed="rId2">
+            <a:extLst>
+              <a:ext uri="{28A0092B-C50C-407E-A947-70E740481C1C}">
+                <a14:useLocalDpi xmlns:a14="http://schemas.microsoft.com/office/drawing/2010/main" val="0"/>
+              </a:ext>
+            </a:extLst>
+          </a:blip>
+          <a:srcRect/>
+          <a:stretch>
+            <a:fillRect/>
+          </a:stretch>
+        </p:blipFill>
+        <p:spPr bwMode="auto">
+          <a:xfrm>
+            <a:off x="11135913" y="30480"/>
+            <a:ext cx="974807" cy="825402"/>
+          </a:xfrm>
+          <a:prstGeom prst="rect">
+            <a:avLst/>
+          </a:prstGeom>
+          <a:noFill/>
+          <a:extLst>
+            <a:ext uri="{909E8E84-426E-40DD-AFC4-6F175D3DCCD1}">
+              <a14:hiddenFill xmlns:a14="http://schemas.microsoft.com/office/drawing/2010/main">
+                <a:solidFill>
+                  <a:srgbClr val="FFFFFF"/>
+                </a:solidFill>
+              </a14:hiddenFill>
+            </a:ext>
+          </a:extLst>
+        </p:spPr>
+      </p:pic>
+      <p:sp>
+        <p:nvSpPr>
+          <p:cNvPr id="6" name="CuadroTexto 5">
+            <a:extLst>
+              <a:ext uri="{FF2B5EF4-FFF2-40B4-BE49-F238E27FC236}">
+                <a16:creationId xmlns:a16="http://schemas.microsoft.com/office/drawing/2014/main" id="{5A09965E-1AA7-4955-EA0B-59F1D1D0BE72}"/>
+              </a:ext>
+            </a:extLst>
+          </p:cNvPr>
+          <p:cNvSpPr txBox="1"/>
+          <p:nvPr/>
+        </p:nvSpPr>
+        <p:spPr>
+          <a:xfrm>
+            <a:off x="503358" y="6291699"/>
+            <a:ext cx="7604321" cy="276999"/>
+          </a:xfrm>
+          <a:prstGeom prst="rect">
+            <a:avLst/>
+          </a:prstGeom>
+          <a:noFill/>
+        </p:spPr>
+        <p:txBody>
+          <a:bodyPr wrap="square">
+            <a:spAutoFit/>
+          </a:bodyPr>
+          <a:lstStyle/>
+          <a:p>
+            <a:r>
+              <a:rPr lang="es-CL" sz="1200" b="1" i="1" dirty="0"/>
+              <a:t>Nota:</a:t>
+            </a:r>
+            <a:r>
+              <a:rPr lang="es-CL" sz="1200" dirty="0"/>
+              <a:t> https://blog.langchain.com/few-shot-prompting-to-improve-tool-calling-performance/ </a:t>
+            </a:r>
+          </a:p>
+        </p:txBody>
+      </p:sp>
+      <p:sp>
+        <p:nvSpPr>
+          <p:cNvPr id="3" name="Título 1">
+            <a:extLst>
+              <a:ext uri="{FF2B5EF4-FFF2-40B4-BE49-F238E27FC236}">
+                <a16:creationId xmlns:a16="http://schemas.microsoft.com/office/drawing/2014/main" id="{F5681707-FFBC-C1EA-DF55-C85DF5E7A034}"/>
+              </a:ext>
+            </a:extLst>
+          </p:cNvPr>
+          <p:cNvSpPr txBox="1">
+            <a:spLocks/>
+          </p:cNvSpPr>
+          <p:nvPr/>
+        </p:nvSpPr>
+        <p:spPr>
+          <a:xfrm>
+            <a:off x="5878113" y="993489"/>
+            <a:ext cx="5257800" cy="4025551"/>
+          </a:xfrm>
+          <a:prstGeom prst="rect">
+            <a:avLst/>
+          </a:prstGeom>
+        </p:spPr>
+        <p:txBody>
+          <a:bodyPr vert="horz" lIns="91440" tIns="45720" rIns="91440" bIns="45720" rtlCol="0" anchor="ctr">
+            <a:noAutofit/>
+          </a:bodyPr>
+          <a:lstStyle>
+            <a:lvl1pPr algn="l" defTabSz="914400" rtl="0" eaLnBrk="1" latinLnBrk="0" hangingPunct="1">
+              <a:lnSpc>
+                <a:spcPct val="90000"/>
+              </a:lnSpc>
+              <a:spcBef>
+                <a:spcPct val="0"/>
+              </a:spcBef>
+              <a:buNone/>
+              <a:defRPr sz="4400" kern="1200">
+                <a:solidFill>
+                  <a:schemeClr val="tx1"/>
+                </a:solidFill>
+                <a:latin typeface="+mj-lt"/>
+                <a:ea typeface="+mj-ea"/>
+                <a:cs typeface="+mj-cs"/>
+              </a:defRPr>
+            </a:lvl1pPr>
+          </a:lstStyle>
+          <a:p>
+            <a:r>
               <a:rPr lang="es-CL" sz="2400" b="1" i="1" dirty="0"/>
               <a:t>Mensaje directo al LLM, sin ningún ejemplo previo. </a:t>
             </a:r>
@@ -5184,7 +5669,7 @@
 </p:sld>
 </file>
 
-<file path=ppt/slides/slide11.xml><?xml version="1.0" encoding="utf-8"?>
+<file path=ppt/slides/slide13.xml><?xml version="1.0" encoding="utf-8"?>
 <p:sld xmlns:a="http://schemas.openxmlformats.org/drawingml/2006/main" xmlns:r="http://schemas.openxmlformats.org/officeDocument/2006/relationships" xmlns:p="http://schemas.openxmlformats.org/presentationml/2006/main">
   <p:cSld>
     <p:spTree>
@@ -5466,7 +5951,7 @@
 </p:sld>
 </file>
 
-<file path=ppt/slides/slide12.xml><?xml version="1.0" encoding="utf-8"?>
+<file path=ppt/slides/slide14.xml><?xml version="1.0" encoding="utf-8"?>
 <p:sld xmlns:a="http://schemas.openxmlformats.org/drawingml/2006/main" xmlns:r="http://schemas.openxmlformats.org/officeDocument/2006/relationships" xmlns:p="http://schemas.openxmlformats.org/presentationml/2006/main">
   <p:cSld>
     <p:spTree>
@@ -5770,7 +6255,7 @@
 </p:sld>
 </file>
 
-<file path=ppt/slides/slide13.xml><?xml version="1.0" encoding="utf-8"?>
+<file path=ppt/slides/slide15.xml><?xml version="1.0" encoding="utf-8"?>
 <p:sld xmlns:a="http://schemas.openxmlformats.org/drawingml/2006/main" xmlns:r="http://schemas.openxmlformats.org/officeDocument/2006/relationships" xmlns:p="http://schemas.openxmlformats.org/presentationml/2006/main">
   <p:cSld>
     <p:spTree>
@@ -6599,7 +7084,7 @@
 </p:sld>
 </file>
 
-<file path=ppt/slides/slide14.xml><?xml version="1.0" encoding="utf-8"?>
+<file path=ppt/slides/slide16.xml><?xml version="1.0" encoding="utf-8"?>
 <p:sld xmlns:a="http://schemas.openxmlformats.org/drawingml/2006/main" xmlns:r="http://schemas.openxmlformats.org/officeDocument/2006/relationships" xmlns:p="http://schemas.openxmlformats.org/presentationml/2006/main">
   <p:cSld>
     <p:spTree>
@@ -6811,7 +7296,7 @@
 </p:sld>
 </file>
 
-<file path=ppt/slides/slide15.xml><?xml version="1.0" encoding="utf-8"?>
+<file path=ppt/slides/slide17.xml><?xml version="1.0" encoding="utf-8"?>
 <p:sld xmlns:a="http://schemas.openxmlformats.org/drawingml/2006/main" xmlns:r="http://schemas.openxmlformats.org/officeDocument/2006/relationships" xmlns:p="http://schemas.openxmlformats.org/presentationml/2006/main">
   <p:cSld>
     <p:spTree>
@@ -8208,6 +8693,1456 @@
         <p:cNvPr id="1" name="">
           <a:extLst>
             <a:ext uri="{FF2B5EF4-FFF2-40B4-BE49-F238E27FC236}">
+              <a16:creationId xmlns:a16="http://schemas.microsoft.com/office/drawing/2014/main" id="{1C99ED0E-F8B6-BECA-055E-F89143B0304B}"/>
+            </a:ext>
+          </a:extLst>
+        </p:cNvPr>
+        <p:cNvGrpSpPr/>
+        <p:nvPr/>
+      </p:nvGrpSpPr>
+      <p:grpSpPr>
+        <a:xfrm>
+          <a:off x="0" y="0"/>
+          <a:ext cx="0" cy="0"/>
+          <a:chOff x="0" y="0"/>
+          <a:chExt cx="0" cy="0"/>
+        </a:xfrm>
+      </p:grpSpPr>
+      <p:sp>
+        <p:nvSpPr>
+          <p:cNvPr id="2" name="Título 1">
+            <a:extLst>
+              <a:ext uri="{FF2B5EF4-FFF2-40B4-BE49-F238E27FC236}">
+                <a16:creationId xmlns:a16="http://schemas.microsoft.com/office/drawing/2014/main" id="{3A2CFC42-A4EA-B840-37D0-8D1BB2B8A6C8}"/>
+              </a:ext>
+            </a:extLst>
+          </p:cNvPr>
+          <p:cNvSpPr>
+            <a:spLocks noGrp="1"/>
+          </p:cNvSpPr>
+          <p:nvPr>
+            <p:ph type="title"/>
+          </p:nvPr>
+        </p:nvSpPr>
+        <p:spPr>
+          <a:xfrm>
+            <a:off x="467913" y="113696"/>
+            <a:ext cx="10515600" cy="1325563"/>
+          </a:xfrm>
+        </p:spPr>
+        <p:txBody>
+          <a:bodyPr>
+            <a:noAutofit/>
+          </a:bodyPr>
+          <a:lstStyle/>
+          <a:p>
+            <a:r>
+              <a:rPr lang="es-CL" b="1" i="1" dirty="0"/>
+              <a:t>Reminder:</a:t>
+            </a:r>
+            <a:r>
+              <a:rPr lang="es-CL" dirty="0"/>
+              <a:t> </a:t>
+            </a:r>
+            <a:r>
+              <a:rPr lang="es-CL" sz="3600" i="1" dirty="0"/>
+              <a:t>Que hemos visto hasta ahora…</a:t>
+            </a:r>
+          </a:p>
+        </p:txBody>
+      </p:sp>
+      <p:pic>
+        <p:nvPicPr>
+          <p:cNvPr id="4" name="Picture 2" descr="Duoc UC - Learn Chile">
+            <a:extLst>
+              <a:ext uri="{FF2B5EF4-FFF2-40B4-BE49-F238E27FC236}">
+                <a16:creationId xmlns:a16="http://schemas.microsoft.com/office/drawing/2014/main" id="{52555913-07F9-9178-83D0-341E967AC175}"/>
+              </a:ext>
+            </a:extLst>
+          </p:cNvPr>
+          <p:cNvPicPr>
+            <a:picLocks noChangeAspect="1" noChangeArrowheads="1"/>
+          </p:cNvPicPr>
+          <p:nvPr/>
+        </p:nvPicPr>
+        <p:blipFill>
+          <a:blip r:embed="rId2">
+            <a:extLst>
+              <a:ext uri="{28A0092B-C50C-407E-A947-70E740481C1C}">
+                <a14:useLocalDpi xmlns:a14="http://schemas.microsoft.com/office/drawing/2010/main" val="0"/>
+              </a:ext>
+            </a:extLst>
+          </a:blip>
+          <a:srcRect/>
+          <a:stretch>
+            <a:fillRect/>
+          </a:stretch>
+        </p:blipFill>
+        <p:spPr bwMode="auto">
+          <a:xfrm>
+            <a:off x="11135913" y="30480"/>
+            <a:ext cx="974807" cy="825402"/>
+          </a:xfrm>
+          <a:prstGeom prst="rect">
+            <a:avLst/>
+          </a:prstGeom>
+          <a:noFill/>
+          <a:extLst>
+            <a:ext uri="{909E8E84-426E-40DD-AFC4-6F175D3DCCD1}">
+              <a14:hiddenFill xmlns:a14="http://schemas.microsoft.com/office/drawing/2010/main">
+                <a:solidFill>
+                  <a:srgbClr val="FFFFFF"/>
+                </a:solidFill>
+              </a14:hiddenFill>
+            </a:ext>
+          </a:extLst>
+        </p:spPr>
+      </p:pic>
+      <p:sp>
+        <p:nvSpPr>
+          <p:cNvPr id="9" name="CuadroTexto 8">
+            <a:extLst>
+              <a:ext uri="{FF2B5EF4-FFF2-40B4-BE49-F238E27FC236}">
+                <a16:creationId xmlns:a16="http://schemas.microsoft.com/office/drawing/2014/main" id="{85A5714F-54DF-8691-28CB-BF6B6910530F}"/>
+              </a:ext>
+            </a:extLst>
+          </p:cNvPr>
+          <p:cNvSpPr txBox="1"/>
+          <p:nvPr/>
+        </p:nvSpPr>
+        <p:spPr>
+          <a:xfrm>
+            <a:off x="620313" y="6357123"/>
+            <a:ext cx="6096000" cy="307777"/>
+          </a:xfrm>
+          <a:prstGeom prst="rect">
+            <a:avLst/>
+          </a:prstGeom>
+          <a:noFill/>
+        </p:spPr>
+        <p:txBody>
+          <a:bodyPr wrap="square">
+            <a:spAutoFit/>
+          </a:bodyPr>
+          <a:lstStyle/>
+          <a:p>
+            <a:r>
+              <a:rPr lang="es-CL" sz="1400" b="1" i="1" dirty="0"/>
+              <a:t>Nota</a:t>
+            </a:r>
+            <a:r>
+              <a:rPr lang="es-CL" sz="1400" dirty="0"/>
+              <a:t>: https://arxiv.org/pdf/2509.04664</a:t>
+            </a:r>
+          </a:p>
+        </p:txBody>
+      </p:sp>
+      <p:sp>
+        <p:nvSpPr>
+          <p:cNvPr id="3" name="Rectángulo: esquinas redondeadas 2">
+            <a:extLst>
+              <a:ext uri="{FF2B5EF4-FFF2-40B4-BE49-F238E27FC236}">
+                <a16:creationId xmlns:a16="http://schemas.microsoft.com/office/drawing/2014/main" id="{481E169B-F00E-72AD-FB82-E54857197CE2}"/>
+              </a:ext>
+            </a:extLst>
+          </p:cNvPr>
+          <p:cNvSpPr/>
+          <p:nvPr/>
+        </p:nvSpPr>
+        <p:spPr>
+          <a:xfrm>
+            <a:off x="4571999" y="2448041"/>
+            <a:ext cx="2640460" cy="1612595"/>
+          </a:xfrm>
+          <a:prstGeom prst="roundRect">
+            <a:avLst/>
+          </a:prstGeom>
+          <a:solidFill>
+            <a:schemeClr val="bg1"/>
+          </a:solidFill>
+          <a:ln>
+            <a:solidFill>
+              <a:schemeClr val="tx1"/>
+            </a:solidFill>
+          </a:ln>
+        </p:spPr>
+        <p:style>
+          <a:lnRef idx="2">
+            <a:schemeClr val="accent1">
+              <a:shade val="15000"/>
+            </a:schemeClr>
+          </a:lnRef>
+          <a:fillRef idx="1">
+            <a:schemeClr val="accent1"/>
+          </a:fillRef>
+          <a:effectRef idx="0">
+            <a:schemeClr val="accent1"/>
+          </a:effectRef>
+          <a:fontRef idx="minor">
+            <a:schemeClr val="lt1"/>
+          </a:fontRef>
+        </p:style>
+        <p:txBody>
+          <a:bodyPr rtlCol="0" anchor="ctr"/>
+          <a:lstStyle/>
+          <a:p>
+            <a:pPr algn="ctr"/>
+            <a:r>
+              <a:rPr lang="es-MX" dirty="0" err="1">
+                <a:solidFill>
+                  <a:schemeClr val="tx1"/>
+                </a:solidFill>
+              </a:rPr>
+              <a:t>LLMs</a:t>
+            </a:r>
+            <a:endParaRPr lang="es-CL" dirty="0">
+              <a:solidFill>
+                <a:schemeClr val="tx1"/>
+              </a:solidFill>
+            </a:endParaRPr>
+          </a:p>
+        </p:txBody>
+      </p:sp>
+      <p:cxnSp>
+        <p:nvCxnSpPr>
+          <p:cNvPr id="7" name="Conector recto de flecha 6">
+            <a:extLst>
+              <a:ext uri="{FF2B5EF4-FFF2-40B4-BE49-F238E27FC236}">
+                <a16:creationId xmlns:a16="http://schemas.microsoft.com/office/drawing/2014/main" id="{3F1DFB0F-C11B-7ECE-2138-D762EA475E53}"/>
+              </a:ext>
+            </a:extLst>
+          </p:cNvPr>
+          <p:cNvCxnSpPr>
+            <a:cxnSpLocks/>
+          </p:cNvCxnSpPr>
+          <p:nvPr/>
+        </p:nvCxnSpPr>
+        <p:spPr>
+          <a:xfrm>
+            <a:off x="2703816" y="2085353"/>
+            <a:ext cx="1868183" cy="1168986"/>
+          </a:xfrm>
+          <a:prstGeom prst="straightConnector1">
+            <a:avLst/>
+          </a:prstGeom>
+          <a:ln w="19050">
+            <a:solidFill>
+              <a:schemeClr val="tx1"/>
+            </a:solidFill>
+            <a:tailEnd type="triangle"/>
+          </a:ln>
+        </p:spPr>
+        <p:style>
+          <a:lnRef idx="1">
+            <a:schemeClr val="accent1"/>
+          </a:lnRef>
+          <a:fillRef idx="0">
+            <a:schemeClr val="accent1"/>
+          </a:fillRef>
+          <a:effectRef idx="0">
+            <a:schemeClr val="accent1"/>
+          </a:effectRef>
+          <a:fontRef idx="minor">
+            <a:schemeClr val="tx1"/>
+          </a:fontRef>
+        </p:style>
+      </p:cxnSp>
+      <p:cxnSp>
+        <p:nvCxnSpPr>
+          <p:cNvPr id="11" name="Conector recto de flecha 10">
+            <a:extLst>
+              <a:ext uri="{FF2B5EF4-FFF2-40B4-BE49-F238E27FC236}">
+                <a16:creationId xmlns:a16="http://schemas.microsoft.com/office/drawing/2014/main" id="{F516BD4A-0F95-577E-D0D1-58A2323AFD18}"/>
+              </a:ext>
+            </a:extLst>
+          </p:cNvPr>
+          <p:cNvCxnSpPr>
+            <a:cxnSpLocks/>
+          </p:cNvCxnSpPr>
+          <p:nvPr/>
+        </p:nvCxnSpPr>
+        <p:spPr>
+          <a:xfrm flipV="1">
+            <a:off x="2703816" y="3285161"/>
+            <a:ext cx="1868183" cy="1135304"/>
+          </a:xfrm>
+          <a:prstGeom prst="straightConnector1">
+            <a:avLst/>
+          </a:prstGeom>
+          <a:ln w="19050">
+            <a:solidFill>
+              <a:schemeClr val="tx1"/>
+            </a:solidFill>
+            <a:tailEnd type="triangle"/>
+          </a:ln>
+        </p:spPr>
+        <p:style>
+          <a:lnRef idx="1">
+            <a:schemeClr val="accent1"/>
+          </a:lnRef>
+          <a:fillRef idx="0">
+            <a:schemeClr val="accent1"/>
+          </a:fillRef>
+          <a:effectRef idx="0">
+            <a:schemeClr val="accent1"/>
+          </a:effectRef>
+          <a:fontRef idx="minor">
+            <a:schemeClr val="tx1"/>
+          </a:fontRef>
+        </p:style>
+      </p:cxnSp>
+      <p:cxnSp>
+        <p:nvCxnSpPr>
+          <p:cNvPr id="13" name="Conector recto de flecha 12">
+            <a:extLst>
+              <a:ext uri="{FF2B5EF4-FFF2-40B4-BE49-F238E27FC236}">
+                <a16:creationId xmlns:a16="http://schemas.microsoft.com/office/drawing/2014/main" id="{E21BFC83-7B68-6433-E9B4-0201A3DBAB7A}"/>
+              </a:ext>
+            </a:extLst>
+          </p:cNvPr>
+          <p:cNvCxnSpPr>
+            <a:cxnSpLocks/>
+            <a:stCxn id="3" idx="3"/>
+          </p:cNvCxnSpPr>
+          <p:nvPr/>
+        </p:nvCxnSpPr>
+        <p:spPr>
+          <a:xfrm>
+            <a:off x="7212459" y="3254339"/>
+            <a:ext cx="1962363" cy="0"/>
+          </a:xfrm>
+          <a:prstGeom prst="straightConnector1">
+            <a:avLst/>
+          </a:prstGeom>
+          <a:ln w="19050">
+            <a:solidFill>
+              <a:schemeClr val="tx1"/>
+            </a:solidFill>
+            <a:tailEnd type="triangle"/>
+          </a:ln>
+        </p:spPr>
+        <p:style>
+          <a:lnRef idx="1">
+            <a:schemeClr val="accent1"/>
+          </a:lnRef>
+          <a:fillRef idx="0">
+            <a:schemeClr val="accent1"/>
+          </a:fillRef>
+          <a:effectRef idx="0">
+            <a:schemeClr val="accent1"/>
+          </a:effectRef>
+          <a:fontRef idx="minor">
+            <a:schemeClr val="tx1"/>
+          </a:fontRef>
+        </p:style>
+      </p:cxnSp>
+      <p:sp>
+        <p:nvSpPr>
+          <p:cNvPr id="18" name="CuadroTexto 17">
+            <a:extLst>
+              <a:ext uri="{FF2B5EF4-FFF2-40B4-BE49-F238E27FC236}">
+                <a16:creationId xmlns:a16="http://schemas.microsoft.com/office/drawing/2014/main" id="{62E2D3B5-6BB2-493A-0860-90574EABC06A}"/>
+              </a:ext>
+            </a:extLst>
+          </p:cNvPr>
+          <p:cNvSpPr txBox="1"/>
+          <p:nvPr/>
+        </p:nvSpPr>
+        <p:spPr>
+          <a:xfrm>
+            <a:off x="467913" y="1685198"/>
+            <a:ext cx="2301410" cy="2031325"/>
+          </a:xfrm>
+          <a:prstGeom prst="rect">
+            <a:avLst/>
+          </a:prstGeom>
+          <a:noFill/>
+        </p:spPr>
+        <p:txBody>
+          <a:bodyPr wrap="square" rtlCol="0">
+            <a:spAutoFit/>
+          </a:bodyPr>
+          <a:lstStyle/>
+          <a:p>
+            <a:r>
+              <a:rPr lang="es-MX" i="1" dirty="0"/>
+              <a:t>Los </a:t>
+            </a:r>
+            <a:r>
+              <a:rPr lang="es-MX" i="1" dirty="0" err="1"/>
+              <a:t>LLMs</a:t>
+            </a:r>
+            <a:r>
+              <a:rPr lang="es-MX" i="1" dirty="0"/>
+              <a:t> tiene una estructura de mensajes:</a:t>
+            </a:r>
+          </a:p>
+          <a:p>
+            <a:r>
+              <a:rPr lang="es-MX" b="1" i="1" dirty="0"/>
+              <a:t>-</a:t>
+            </a:r>
+            <a:r>
+              <a:rPr lang="es-MX" b="1" i="1" dirty="0" err="1"/>
+              <a:t>Prompt</a:t>
+            </a:r>
+            <a:r>
+              <a:rPr lang="es-MX" b="1" i="1" dirty="0"/>
+              <a:t> de Sistema</a:t>
+            </a:r>
+          </a:p>
+          <a:p>
+            <a:r>
+              <a:rPr lang="es-MX" b="1" i="1" dirty="0"/>
+              <a:t>-Human </a:t>
+            </a:r>
+            <a:r>
+              <a:rPr lang="es-MX" b="1" i="1" dirty="0" err="1"/>
+              <a:t>Message</a:t>
+            </a:r>
+            <a:endParaRPr lang="es-MX" b="1" i="1" dirty="0"/>
+          </a:p>
+          <a:p>
+            <a:r>
+              <a:rPr lang="es-MX" b="1" i="1" dirty="0"/>
+              <a:t>-</a:t>
+            </a:r>
+            <a:r>
+              <a:rPr lang="es-MX" b="1" i="1" dirty="0" err="1"/>
+              <a:t>Asistent</a:t>
+            </a:r>
+            <a:r>
+              <a:rPr lang="es-MX" b="1" i="1" dirty="0"/>
+              <a:t> </a:t>
+            </a:r>
+            <a:r>
+              <a:rPr lang="es-MX" b="1" i="1" dirty="0" err="1"/>
+              <a:t>Message</a:t>
+            </a:r>
+            <a:endParaRPr lang="es-MX" b="1" i="1" dirty="0"/>
+          </a:p>
+          <a:p>
+            <a:r>
+              <a:rPr lang="es-MX" i="1" dirty="0"/>
+              <a:t> </a:t>
+            </a:r>
+            <a:endParaRPr lang="es-CL" i="1" dirty="0"/>
+          </a:p>
+        </p:txBody>
+      </p:sp>
+      <p:sp>
+        <p:nvSpPr>
+          <p:cNvPr id="19" name="CuadroTexto 18">
+            <a:extLst>
+              <a:ext uri="{FF2B5EF4-FFF2-40B4-BE49-F238E27FC236}">
+                <a16:creationId xmlns:a16="http://schemas.microsoft.com/office/drawing/2014/main" id="{3B18933A-DBE1-FF87-0F38-CEDCEFDB3FF0}"/>
+              </a:ext>
+            </a:extLst>
+          </p:cNvPr>
+          <p:cNvSpPr txBox="1"/>
+          <p:nvPr/>
+        </p:nvSpPr>
+        <p:spPr>
+          <a:xfrm>
+            <a:off x="328137" y="3972473"/>
+            <a:ext cx="2515455" cy="1200329"/>
+          </a:xfrm>
+          <a:prstGeom prst="rect">
+            <a:avLst/>
+          </a:prstGeom>
+          <a:noFill/>
+        </p:spPr>
+        <p:txBody>
+          <a:bodyPr wrap="square" rtlCol="0">
+            <a:spAutoFit/>
+          </a:bodyPr>
+          <a:lstStyle/>
+          <a:p>
+            <a:r>
+              <a:rPr lang="es-MX" i="1" dirty="0"/>
+              <a:t>Los </a:t>
+            </a:r>
+            <a:r>
+              <a:rPr lang="es-MX" i="1" dirty="0" err="1"/>
+              <a:t>LLMs</a:t>
+            </a:r>
+            <a:r>
+              <a:rPr lang="es-MX" i="1" dirty="0"/>
+              <a:t> tiene una parámetros de entrada</a:t>
+            </a:r>
+          </a:p>
+          <a:p>
+            <a:r>
+              <a:rPr lang="es-MX" i="1" dirty="0"/>
+              <a:t>-</a:t>
+            </a:r>
+            <a:r>
+              <a:rPr lang="es-MX" i="1" dirty="0" err="1"/>
+              <a:t>Tempuratura</a:t>
+            </a:r>
+            <a:endParaRPr lang="es-MX" i="1" dirty="0"/>
+          </a:p>
+          <a:p>
+            <a:r>
+              <a:rPr lang="es-MX" i="1" dirty="0"/>
+              <a:t>-Max token</a:t>
+            </a:r>
+          </a:p>
+        </p:txBody>
+      </p:sp>
+      <p:sp>
+        <p:nvSpPr>
+          <p:cNvPr id="20" name="CuadroTexto 19">
+            <a:extLst>
+              <a:ext uri="{FF2B5EF4-FFF2-40B4-BE49-F238E27FC236}">
+                <a16:creationId xmlns:a16="http://schemas.microsoft.com/office/drawing/2014/main" id="{ED0E1BD5-D542-3F51-A9E0-C1EBF0D742B1}"/>
+              </a:ext>
+            </a:extLst>
+          </p:cNvPr>
+          <p:cNvSpPr txBox="1"/>
+          <p:nvPr/>
+        </p:nvSpPr>
+        <p:spPr>
+          <a:xfrm>
+            <a:off x="9321906" y="2389140"/>
+            <a:ext cx="2301410" cy="2308324"/>
+          </a:xfrm>
+          <a:prstGeom prst="rect">
+            <a:avLst/>
+          </a:prstGeom>
+          <a:noFill/>
+        </p:spPr>
+        <p:txBody>
+          <a:bodyPr wrap="square" rtlCol="0">
+            <a:spAutoFit/>
+          </a:bodyPr>
+          <a:lstStyle/>
+          <a:p>
+            <a:r>
+              <a:rPr lang="es-MX" i="1" dirty="0"/>
+              <a:t>Los </a:t>
+            </a:r>
+            <a:r>
+              <a:rPr lang="es-MX" i="1" dirty="0" err="1"/>
+              <a:t>LLMs</a:t>
+            </a:r>
+            <a:r>
+              <a:rPr lang="es-MX" i="1" dirty="0"/>
+              <a:t> entregan los siguiente output:</a:t>
+            </a:r>
+          </a:p>
+          <a:p>
+            <a:r>
+              <a:rPr lang="es-MX" i="1" dirty="0"/>
+              <a:t>- Texto generado (response/</a:t>
+            </a:r>
+            <a:r>
+              <a:rPr lang="es-MX" i="1" dirty="0" err="1"/>
+              <a:t>completion</a:t>
+            </a:r>
+            <a:r>
+              <a:rPr lang="es-MX" i="1" dirty="0"/>
+              <a:t>)</a:t>
+            </a:r>
+          </a:p>
+          <a:p>
+            <a:r>
+              <a:rPr lang="es-MX" i="1" dirty="0"/>
+              <a:t>- </a:t>
+            </a:r>
+            <a:r>
+              <a:rPr lang="es-MX" i="1" dirty="0" err="1"/>
+              <a:t>Usage_prompt</a:t>
+            </a:r>
+            <a:r>
+              <a:rPr lang="es-MX" i="1" dirty="0"/>
+              <a:t> (</a:t>
+            </a:r>
+          </a:p>
+          <a:p>
+            <a:r>
+              <a:rPr lang="es-MX" i="1" dirty="0" err="1"/>
+              <a:t>Prompt</a:t>
+            </a:r>
+            <a:r>
+              <a:rPr lang="es-MX" i="1" dirty="0"/>
+              <a:t>, </a:t>
+            </a:r>
+            <a:r>
+              <a:rPr lang="es-MX" i="1" dirty="0" err="1"/>
+              <a:t>completion</a:t>
+            </a:r>
+            <a:r>
+              <a:rPr lang="es-MX" i="1" dirty="0"/>
+              <a:t> and total tokens)</a:t>
+            </a:r>
+          </a:p>
+          <a:p>
+            <a:r>
+              <a:rPr lang="es-MX" i="1" dirty="0"/>
+              <a:t>- </a:t>
+            </a:r>
+            <a:r>
+              <a:rPr lang="es-MX" i="1" dirty="0" err="1"/>
+              <a:t>Finished</a:t>
+            </a:r>
+            <a:r>
+              <a:rPr lang="es-MX" i="1" dirty="0"/>
+              <a:t> </a:t>
+            </a:r>
+            <a:r>
+              <a:rPr lang="es-MX" i="1" dirty="0" err="1"/>
+              <a:t>reason</a:t>
+            </a:r>
+            <a:r>
+              <a:rPr lang="es-MX" i="1" dirty="0"/>
+              <a:t>.</a:t>
+            </a:r>
+          </a:p>
+        </p:txBody>
+      </p:sp>
+    </p:spTree>
+    <p:extLst>
+      <p:ext uri="{BB962C8B-B14F-4D97-AF65-F5344CB8AC3E}">
+        <p14:creationId xmlns:p14="http://schemas.microsoft.com/office/powerpoint/2010/main" val="4270404476"/>
+      </p:ext>
+    </p:extLst>
+  </p:cSld>
+  <p:clrMapOvr>
+    <a:masterClrMapping/>
+  </p:clrMapOvr>
+</p:sld>
+</file>
+
+<file path=ppt/slides/slide5.xml><?xml version="1.0" encoding="utf-8"?>
+<p:sld xmlns:a="http://schemas.openxmlformats.org/drawingml/2006/main" xmlns:r="http://schemas.openxmlformats.org/officeDocument/2006/relationships" xmlns:p="http://schemas.openxmlformats.org/presentationml/2006/main">
+  <p:cSld>
+    <p:spTree>
+      <p:nvGrpSpPr>
+        <p:cNvPr id="1" name="">
+          <a:extLst>
+            <a:ext uri="{FF2B5EF4-FFF2-40B4-BE49-F238E27FC236}">
+              <a16:creationId xmlns:a16="http://schemas.microsoft.com/office/drawing/2014/main" id="{76EA64D0-9D25-0F5B-463E-2C59EFEDB2DD}"/>
+            </a:ext>
+          </a:extLst>
+        </p:cNvPr>
+        <p:cNvGrpSpPr/>
+        <p:nvPr/>
+      </p:nvGrpSpPr>
+      <p:grpSpPr>
+        <a:xfrm>
+          <a:off x="0" y="0"/>
+          <a:ext cx="0" cy="0"/>
+          <a:chOff x="0" y="0"/>
+          <a:chExt cx="0" cy="0"/>
+        </a:xfrm>
+      </p:grpSpPr>
+      <p:sp>
+        <p:nvSpPr>
+          <p:cNvPr id="2" name="Título 1">
+            <a:extLst>
+              <a:ext uri="{FF2B5EF4-FFF2-40B4-BE49-F238E27FC236}">
+                <a16:creationId xmlns:a16="http://schemas.microsoft.com/office/drawing/2014/main" id="{66FC0AFF-BF81-7614-B2DC-CBD76E91925F}"/>
+              </a:ext>
+            </a:extLst>
+          </p:cNvPr>
+          <p:cNvSpPr>
+            <a:spLocks noGrp="1"/>
+          </p:cNvSpPr>
+          <p:nvPr>
+            <p:ph type="title"/>
+          </p:nvPr>
+        </p:nvSpPr>
+        <p:spPr>
+          <a:xfrm>
+            <a:off x="467913" y="113696"/>
+            <a:ext cx="10515600" cy="1325563"/>
+          </a:xfrm>
+        </p:spPr>
+        <p:txBody>
+          <a:bodyPr>
+            <a:noAutofit/>
+          </a:bodyPr>
+          <a:lstStyle/>
+          <a:p>
+            <a:r>
+              <a:rPr lang="es-CL" b="1" i="1" dirty="0"/>
+              <a:t>Reminder:</a:t>
+            </a:r>
+            <a:r>
+              <a:rPr lang="es-CL" dirty="0"/>
+              <a:t> </a:t>
+            </a:r>
+            <a:r>
+              <a:rPr lang="es-CL" sz="3600" i="1" dirty="0"/>
+              <a:t>Que hemos visto hasta ahora…</a:t>
+            </a:r>
+          </a:p>
+        </p:txBody>
+      </p:sp>
+      <p:pic>
+        <p:nvPicPr>
+          <p:cNvPr id="4" name="Picture 2" descr="Duoc UC - Learn Chile">
+            <a:extLst>
+              <a:ext uri="{FF2B5EF4-FFF2-40B4-BE49-F238E27FC236}">
+                <a16:creationId xmlns:a16="http://schemas.microsoft.com/office/drawing/2014/main" id="{77BA5057-F796-7C0D-775A-278C7B578AF2}"/>
+              </a:ext>
+            </a:extLst>
+          </p:cNvPr>
+          <p:cNvPicPr>
+            <a:picLocks noChangeAspect="1" noChangeArrowheads="1"/>
+          </p:cNvPicPr>
+          <p:nvPr/>
+        </p:nvPicPr>
+        <p:blipFill>
+          <a:blip r:embed="rId2">
+            <a:extLst>
+              <a:ext uri="{28A0092B-C50C-407E-A947-70E740481C1C}">
+                <a14:useLocalDpi xmlns:a14="http://schemas.microsoft.com/office/drawing/2010/main" val="0"/>
+              </a:ext>
+            </a:extLst>
+          </a:blip>
+          <a:srcRect/>
+          <a:stretch>
+            <a:fillRect/>
+          </a:stretch>
+        </p:blipFill>
+        <p:spPr bwMode="auto">
+          <a:xfrm>
+            <a:off x="11135913" y="30480"/>
+            <a:ext cx="974807" cy="825402"/>
+          </a:xfrm>
+          <a:prstGeom prst="rect">
+            <a:avLst/>
+          </a:prstGeom>
+          <a:noFill/>
+          <a:extLst>
+            <a:ext uri="{909E8E84-426E-40DD-AFC4-6F175D3DCCD1}">
+              <a14:hiddenFill xmlns:a14="http://schemas.microsoft.com/office/drawing/2010/main">
+                <a:solidFill>
+                  <a:srgbClr val="FFFFFF"/>
+                </a:solidFill>
+              </a14:hiddenFill>
+            </a:ext>
+          </a:extLst>
+        </p:spPr>
+      </p:pic>
+      <p:sp>
+        <p:nvSpPr>
+          <p:cNvPr id="3" name="Rectángulo: esquinas redondeadas 2">
+            <a:extLst>
+              <a:ext uri="{FF2B5EF4-FFF2-40B4-BE49-F238E27FC236}">
+                <a16:creationId xmlns:a16="http://schemas.microsoft.com/office/drawing/2014/main" id="{30D6B4F4-73E0-017D-2EA2-6E32745F8FF6}"/>
+              </a:ext>
+            </a:extLst>
+          </p:cNvPr>
+          <p:cNvSpPr/>
+          <p:nvPr/>
+        </p:nvSpPr>
+        <p:spPr>
+          <a:xfrm>
+            <a:off x="4571999" y="2448041"/>
+            <a:ext cx="2640460" cy="1612595"/>
+          </a:xfrm>
+          <a:prstGeom prst="roundRect">
+            <a:avLst/>
+          </a:prstGeom>
+          <a:solidFill>
+            <a:schemeClr val="bg1"/>
+          </a:solidFill>
+          <a:ln>
+            <a:solidFill>
+              <a:schemeClr val="tx1"/>
+            </a:solidFill>
+          </a:ln>
+        </p:spPr>
+        <p:style>
+          <a:lnRef idx="2">
+            <a:schemeClr val="accent1">
+              <a:shade val="15000"/>
+            </a:schemeClr>
+          </a:lnRef>
+          <a:fillRef idx="1">
+            <a:schemeClr val="accent1"/>
+          </a:fillRef>
+          <a:effectRef idx="0">
+            <a:schemeClr val="accent1"/>
+          </a:effectRef>
+          <a:fontRef idx="minor">
+            <a:schemeClr val="lt1"/>
+          </a:fontRef>
+        </p:style>
+        <p:txBody>
+          <a:bodyPr rtlCol="0" anchor="ctr"/>
+          <a:lstStyle/>
+          <a:p>
+            <a:pPr algn="ctr"/>
+            <a:r>
+              <a:rPr lang="es-MX" dirty="0" err="1">
+                <a:solidFill>
+                  <a:schemeClr val="tx1"/>
+                </a:solidFill>
+              </a:rPr>
+              <a:t>LLMs</a:t>
+            </a:r>
+            <a:endParaRPr lang="es-CL" dirty="0">
+              <a:solidFill>
+                <a:schemeClr val="tx1"/>
+              </a:solidFill>
+            </a:endParaRPr>
+          </a:p>
+        </p:txBody>
+      </p:sp>
+      <p:cxnSp>
+        <p:nvCxnSpPr>
+          <p:cNvPr id="7" name="Conector recto de flecha 6">
+            <a:extLst>
+              <a:ext uri="{FF2B5EF4-FFF2-40B4-BE49-F238E27FC236}">
+                <a16:creationId xmlns:a16="http://schemas.microsoft.com/office/drawing/2014/main" id="{468DD948-8DAF-CB43-3A1D-5DE2E95BFDE9}"/>
+              </a:ext>
+            </a:extLst>
+          </p:cNvPr>
+          <p:cNvCxnSpPr>
+            <a:cxnSpLocks/>
+          </p:cNvCxnSpPr>
+          <p:nvPr/>
+        </p:nvCxnSpPr>
+        <p:spPr>
+          <a:xfrm>
+            <a:off x="2703816" y="2085353"/>
+            <a:ext cx="1868183" cy="1168986"/>
+          </a:xfrm>
+          <a:prstGeom prst="straightConnector1">
+            <a:avLst/>
+          </a:prstGeom>
+          <a:ln w="19050">
+            <a:solidFill>
+              <a:schemeClr val="tx1"/>
+            </a:solidFill>
+            <a:tailEnd type="triangle"/>
+          </a:ln>
+        </p:spPr>
+        <p:style>
+          <a:lnRef idx="1">
+            <a:schemeClr val="accent1"/>
+          </a:lnRef>
+          <a:fillRef idx="0">
+            <a:schemeClr val="accent1"/>
+          </a:fillRef>
+          <a:effectRef idx="0">
+            <a:schemeClr val="accent1"/>
+          </a:effectRef>
+          <a:fontRef idx="minor">
+            <a:schemeClr val="tx1"/>
+          </a:fontRef>
+        </p:style>
+      </p:cxnSp>
+      <p:cxnSp>
+        <p:nvCxnSpPr>
+          <p:cNvPr id="11" name="Conector recto de flecha 10">
+            <a:extLst>
+              <a:ext uri="{FF2B5EF4-FFF2-40B4-BE49-F238E27FC236}">
+                <a16:creationId xmlns:a16="http://schemas.microsoft.com/office/drawing/2014/main" id="{79FE218D-2E71-8FFF-EA51-CFC35ED2F7A6}"/>
+              </a:ext>
+            </a:extLst>
+          </p:cNvPr>
+          <p:cNvCxnSpPr>
+            <a:cxnSpLocks/>
+          </p:cNvCxnSpPr>
+          <p:nvPr/>
+        </p:nvCxnSpPr>
+        <p:spPr>
+          <a:xfrm flipV="1">
+            <a:off x="2703816" y="3285161"/>
+            <a:ext cx="1868183" cy="1135304"/>
+          </a:xfrm>
+          <a:prstGeom prst="straightConnector1">
+            <a:avLst/>
+          </a:prstGeom>
+          <a:ln w="19050">
+            <a:solidFill>
+              <a:schemeClr val="tx1"/>
+            </a:solidFill>
+            <a:tailEnd type="triangle"/>
+          </a:ln>
+        </p:spPr>
+        <p:style>
+          <a:lnRef idx="1">
+            <a:schemeClr val="accent1"/>
+          </a:lnRef>
+          <a:fillRef idx="0">
+            <a:schemeClr val="accent1"/>
+          </a:fillRef>
+          <a:effectRef idx="0">
+            <a:schemeClr val="accent1"/>
+          </a:effectRef>
+          <a:fontRef idx="minor">
+            <a:schemeClr val="tx1"/>
+          </a:fontRef>
+        </p:style>
+      </p:cxnSp>
+      <p:cxnSp>
+        <p:nvCxnSpPr>
+          <p:cNvPr id="13" name="Conector recto de flecha 12">
+            <a:extLst>
+              <a:ext uri="{FF2B5EF4-FFF2-40B4-BE49-F238E27FC236}">
+                <a16:creationId xmlns:a16="http://schemas.microsoft.com/office/drawing/2014/main" id="{21908C19-72D6-0562-F6A3-C4DF386ADAFA}"/>
+              </a:ext>
+            </a:extLst>
+          </p:cNvPr>
+          <p:cNvCxnSpPr>
+            <a:cxnSpLocks/>
+            <a:stCxn id="3" idx="3"/>
+          </p:cNvCxnSpPr>
+          <p:nvPr/>
+        </p:nvCxnSpPr>
+        <p:spPr>
+          <a:xfrm>
+            <a:off x="7212459" y="3254339"/>
+            <a:ext cx="1458930" cy="0"/>
+          </a:xfrm>
+          <a:prstGeom prst="straightConnector1">
+            <a:avLst/>
+          </a:prstGeom>
+          <a:ln w="19050">
+            <a:solidFill>
+              <a:schemeClr val="tx1"/>
+            </a:solidFill>
+            <a:tailEnd type="triangle"/>
+          </a:ln>
+        </p:spPr>
+        <p:style>
+          <a:lnRef idx="1">
+            <a:schemeClr val="accent1"/>
+          </a:lnRef>
+          <a:fillRef idx="0">
+            <a:schemeClr val="accent1"/>
+          </a:fillRef>
+          <a:effectRef idx="0">
+            <a:schemeClr val="accent1"/>
+          </a:effectRef>
+          <a:fontRef idx="minor">
+            <a:schemeClr val="tx1"/>
+          </a:fontRef>
+        </p:style>
+      </p:cxnSp>
+      <p:sp>
+        <p:nvSpPr>
+          <p:cNvPr id="18" name="CuadroTexto 17">
+            <a:extLst>
+              <a:ext uri="{FF2B5EF4-FFF2-40B4-BE49-F238E27FC236}">
+                <a16:creationId xmlns:a16="http://schemas.microsoft.com/office/drawing/2014/main" id="{2CDD96F5-3D6A-FE31-D0A9-4056EB1849F9}"/>
+              </a:ext>
+            </a:extLst>
+          </p:cNvPr>
+          <p:cNvSpPr txBox="1"/>
+          <p:nvPr/>
+        </p:nvSpPr>
+        <p:spPr>
+          <a:xfrm>
+            <a:off x="467913" y="1685198"/>
+            <a:ext cx="2301410" cy="2308324"/>
+          </a:xfrm>
+          <a:prstGeom prst="rect">
+            <a:avLst/>
+          </a:prstGeom>
+          <a:noFill/>
+        </p:spPr>
+        <p:txBody>
+          <a:bodyPr wrap="square" rtlCol="0">
+            <a:spAutoFit/>
+          </a:bodyPr>
+          <a:lstStyle/>
+          <a:p>
+            <a:r>
+              <a:rPr lang="es-MX" dirty="0"/>
+              <a:t>Los </a:t>
+            </a:r>
+            <a:r>
+              <a:rPr lang="es-MX" dirty="0" err="1"/>
+              <a:t>LLMs</a:t>
+            </a:r>
+            <a:r>
+              <a:rPr lang="es-MX" dirty="0"/>
+              <a:t> tienen una estructura de mensajes, compuesta por:</a:t>
+            </a:r>
+          </a:p>
+          <a:p>
+            <a:r>
+              <a:rPr lang="es-MX" dirty="0"/>
+              <a:t>-</a:t>
+            </a:r>
+            <a:r>
+              <a:rPr lang="es-MX" dirty="0" err="1"/>
+              <a:t>Prompt</a:t>
+            </a:r>
+            <a:r>
+              <a:rPr lang="es-MX" dirty="0"/>
+              <a:t> de sistema</a:t>
+            </a:r>
+          </a:p>
+          <a:p>
+            <a:r>
+              <a:rPr lang="es-MX" dirty="0"/>
+              <a:t>-Human </a:t>
+            </a:r>
+            <a:r>
+              <a:rPr lang="es-MX" dirty="0" err="1"/>
+              <a:t>message</a:t>
+            </a:r>
+            <a:endParaRPr lang="es-MX" dirty="0"/>
+          </a:p>
+          <a:p>
+            <a:r>
+              <a:rPr lang="es-MX" dirty="0"/>
+              <a:t>-</a:t>
+            </a:r>
+            <a:r>
+              <a:rPr lang="es-MX" dirty="0" err="1"/>
+              <a:t>Assistant</a:t>
+            </a:r>
+            <a:r>
+              <a:rPr lang="es-MX" dirty="0"/>
+              <a:t> </a:t>
+            </a:r>
+            <a:r>
+              <a:rPr lang="es-MX" dirty="0" err="1"/>
+              <a:t>message</a:t>
+            </a:r>
+            <a:endParaRPr lang="es-MX" dirty="0"/>
+          </a:p>
+          <a:p>
+            <a:r>
+              <a:rPr lang="es-MX" i="1" dirty="0"/>
+              <a:t> </a:t>
+            </a:r>
+            <a:endParaRPr lang="es-CL" i="1" dirty="0"/>
+          </a:p>
+        </p:txBody>
+      </p:sp>
+      <p:sp>
+        <p:nvSpPr>
+          <p:cNvPr id="19" name="CuadroTexto 18">
+            <a:extLst>
+              <a:ext uri="{FF2B5EF4-FFF2-40B4-BE49-F238E27FC236}">
+                <a16:creationId xmlns:a16="http://schemas.microsoft.com/office/drawing/2014/main" id="{FB423E46-49D6-7D5B-BC8E-106BDC4846CC}"/>
+              </a:ext>
+            </a:extLst>
+          </p:cNvPr>
+          <p:cNvSpPr txBox="1"/>
+          <p:nvPr/>
+        </p:nvSpPr>
+        <p:spPr>
+          <a:xfrm>
+            <a:off x="328137" y="3972473"/>
+            <a:ext cx="2515455" cy="2031325"/>
+          </a:xfrm>
+          <a:prstGeom prst="rect">
+            <a:avLst/>
+          </a:prstGeom>
+          <a:noFill/>
+        </p:spPr>
+        <p:txBody>
+          <a:bodyPr wrap="square" rtlCol="0">
+            <a:spAutoFit/>
+          </a:bodyPr>
+          <a:lstStyle/>
+          <a:p>
+            <a:r>
+              <a:rPr lang="es-MX" dirty="0"/>
+              <a:t>Los </a:t>
+            </a:r>
+            <a:r>
+              <a:rPr lang="es-MX" dirty="0" err="1"/>
+              <a:t>LLMs</a:t>
+            </a:r>
+            <a:r>
+              <a:rPr lang="es-MX" dirty="0"/>
+              <a:t> tienen parámetros de entrada, entre los que se encuentran:</a:t>
+            </a:r>
+          </a:p>
+          <a:p>
+            <a:r>
+              <a:rPr lang="es-CL" dirty="0"/>
+              <a:t>- Temperatura</a:t>
+            </a:r>
+          </a:p>
+          <a:p>
+            <a:r>
+              <a:rPr lang="es-CL" dirty="0"/>
+              <a:t>- Max tokens</a:t>
+            </a:r>
+          </a:p>
+          <a:p>
+            <a:endParaRPr lang="es-MX" i="1" dirty="0"/>
+          </a:p>
+        </p:txBody>
+      </p:sp>
+      <p:sp>
+        <p:nvSpPr>
+          <p:cNvPr id="20" name="CuadroTexto 19">
+            <a:extLst>
+              <a:ext uri="{FF2B5EF4-FFF2-40B4-BE49-F238E27FC236}">
+                <a16:creationId xmlns:a16="http://schemas.microsoft.com/office/drawing/2014/main" id="{6F50EC0A-7182-88DB-F435-9F58F64A56CD}"/>
+              </a:ext>
+            </a:extLst>
+          </p:cNvPr>
+          <p:cNvSpPr txBox="1"/>
+          <p:nvPr/>
+        </p:nvSpPr>
+        <p:spPr>
+          <a:xfrm>
+            <a:off x="8728336" y="2273290"/>
+            <a:ext cx="3463664" cy="2862322"/>
+          </a:xfrm>
+          <a:prstGeom prst="rect">
+            <a:avLst/>
+          </a:prstGeom>
+          <a:noFill/>
+        </p:spPr>
+        <p:txBody>
+          <a:bodyPr wrap="square" rtlCol="0">
+            <a:spAutoFit/>
+          </a:bodyPr>
+          <a:lstStyle/>
+          <a:p>
+            <a:r>
+              <a:rPr lang="es-MX" dirty="0"/>
+              <a:t>Los </a:t>
+            </a:r>
+            <a:r>
+              <a:rPr lang="es-MX" dirty="0" err="1"/>
+              <a:t>LLMs</a:t>
+            </a:r>
+            <a:r>
+              <a:rPr lang="es-MX" dirty="0"/>
+              <a:t> entregan los siguientes outputs:</a:t>
+            </a:r>
+          </a:p>
+          <a:p>
+            <a:r>
+              <a:rPr lang="es-MX" dirty="0"/>
+              <a:t>1-) Texto generado (response/</a:t>
+            </a:r>
+            <a:r>
+              <a:rPr lang="es-MX" dirty="0" err="1"/>
+              <a:t>completion</a:t>
+            </a:r>
+            <a:r>
+              <a:rPr lang="es-MX" dirty="0"/>
+              <a:t>)</a:t>
+            </a:r>
+          </a:p>
+          <a:p>
+            <a:r>
+              <a:rPr lang="es-MX" dirty="0"/>
+              <a:t>2)-</a:t>
+            </a:r>
+            <a:r>
+              <a:rPr lang="es-CL" dirty="0"/>
+              <a:t> </a:t>
+            </a:r>
+            <a:r>
+              <a:rPr lang="es-CL" dirty="0" err="1"/>
+              <a:t>Usage</a:t>
+            </a:r>
+            <a:r>
+              <a:rPr lang="es-CL" dirty="0"/>
+              <a:t> </a:t>
+            </a:r>
+            <a:r>
+              <a:rPr lang="es-CL" dirty="0" err="1"/>
+              <a:t>prompt</a:t>
+            </a:r>
+            <a:r>
+              <a:rPr lang="es-CL" dirty="0"/>
+              <a:t>: incluye </a:t>
+            </a:r>
+            <a:r>
+              <a:rPr lang="es-CL" dirty="0" err="1"/>
+              <a:t>prompt</a:t>
+            </a:r>
+            <a:r>
+              <a:rPr lang="es-CL" dirty="0"/>
+              <a:t> tokens, </a:t>
+            </a:r>
+            <a:r>
+              <a:rPr lang="es-CL" dirty="0" err="1"/>
+              <a:t>completion</a:t>
+            </a:r>
+            <a:r>
+              <a:rPr lang="es-CL" dirty="0"/>
+              <a:t> tokens y total tokens.</a:t>
+            </a:r>
+          </a:p>
+          <a:p>
+            <a:r>
+              <a:rPr lang="es-MX" dirty="0"/>
+              <a:t>- </a:t>
+            </a:r>
+            <a:r>
+              <a:rPr lang="es-MX" dirty="0" err="1"/>
+              <a:t>Finish</a:t>
+            </a:r>
+            <a:r>
+              <a:rPr lang="es-MX" dirty="0"/>
+              <a:t> </a:t>
+            </a:r>
+            <a:r>
+              <a:rPr lang="es-MX" dirty="0" err="1"/>
+              <a:t>reason</a:t>
+            </a:r>
+            <a:r>
+              <a:rPr lang="es-MX" dirty="0"/>
+              <a:t>: indica la razón por la cual el modelo terminó de generar la respuesta.</a:t>
+            </a:r>
+          </a:p>
+        </p:txBody>
+      </p:sp>
+      <p:cxnSp>
+        <p:nvCxnSpPr>
+          <p:cNvPr id="5" name="Conector recto de flecha 4">
+            <a:extLst>
+              <a:ext uri="{FF2B5EF4-FFF2-40B4-BE49-F238E27FC236}">
+                <a16:creationId xmlns:a16="http://schemas.microsoft.com/office/drawing/2014/main" id="{C533743C-4340-4DC6-C7EB-827C0B035B76}"/>
+              </a:ext>
+            </a:extLst>
+          </p:cNvPr>
+          <p:cNvCxnSpPr>
+            <a:cxnSpLocks/>
+          </p:cNvCxnSpPr>
+          <p:nvPr/>
+        </p:nvCxnSpPr>
+        <p:spPr>
+          <a:xfrm flipV="1">
+            <a:off x="2519956" y="1801947"/>
+            <a:ext cx="1661626" cy="942687"/>
+          </a:xfrm>
+          <a:prstGeom prst="straightConnector1">
+            <a:avLst/>
+          </a:prstGeom>
+          <a:ln w="19050">
+            <a:solidFill>
+              <a:schemeClr val="accent1"/>
+            </a:solidFill>
+            <a:tailEnd type="triangle"/>
+          </a:ln>
+        </p:spPr>
+        <p:style>
+          <a:lnRef idx="1">
+            <a:schemeClr val="accent1"/>
+          </a:lnRef>
+          <a:fillRef idx="0">
+            <a:schemeClr val="accent1"/>
+          </a:fillRef>
+          <a:effectRef idx="0">
+            <a:schemeClr val="accent1"/>
+          </a:effectRef>
+          <a:fontRef idx="minor">
+            <a:schemeClr val="tx1"/>
+          </a:fontRef>
+        </p:style>
+      </p:cxnSp>
+      <p:sp>
+        <p:nvSpPr>
+          <p:cNvPr id="10" name="CuadroTexto 9">
+            <a:extLst>
+              <a:ext uri="{FF2B5EF4-FFF2-40B4-BE49-F238E27FC236}">
+                <a16:creationId xmlns:a16="http://schemas.microsoft.com/office/drawing/2014/main" id="{9AD4E7EA-482B-13F3-B669-3D3D1DA7E9F4}"/>
+              </a:ext>
+            </a:extLst>
+          </p:cNvPr>
+          <p:cNvSpPr txBox="1"/>
+          <p:nvPr/>
+        </p:nvSpPr>
+        <p:spPr>
+          <a:xfrm>
+            <a:off x="4181582" y="1569004"/>
+            <a:ext cx="6097712" cy="369332"/>
+          </a:xfrm>
+          <a:prstGeom prst="rect">
+            <a:avLst/>
+          </a:prstGeom>
+          <a:noFill/>
+        </p:spPr>
+        <p:txBody>
+          <a:bodyPr wrap="square">
+            <a:spAutoFit/>
+          </a:bodyPr>
+          <a:lstStyle/>
+          <a:p>
+            <a:r>
+              <a:rPr lang="es-CL" sz="1800" b="1" i="1" dirty="0" err="1">
+                <a:solidFill>
+                  <a:schemeClr val="accent1"/>
+                </a:solidFill>
+              </a:rPr>
+              <a:t>Prompt</a:t>
+            </a:r>
+            <a:r>
+              <a:rPr lang="es-CL" sz="1800" b="1" i="1" dirty="0">
+                <a:solidFill>
+                  <a:schemeClr val="accent1"/>
+                </a:solidFill>
+              </a:rPr>
+              <a:t> </a:t>
+            </a:r>
+            <a:r>
+              <a:rPr lang="es-CL" sz="1800" b="1" i="1" dirty="0" err="1">
+                <a:solidFill>
+                  <a:schemeClr val="accent1"/>
+                </a:solidFill>
+              </a:rPr>
+              <a:t>Engineering</a:t>
+            </a:r>
+            <a:r>
+              <a:rPr lang="es-CL" sz="1800" b="1" i="1" dirty="0">
+                <a:solidFill>
+                  <a:schemeClr val="accent1"/>
+                </a:solidFill>
+              </a:rPr>
+              <a:t>: Estructurar la llamada. </a:t>
+            </a:r>
+            <a:endParaRPr lang="es-CL" dirty="0">
+              <a:solidFill>
+                <a:schemeClr val="accent1"/>
+              </a:solidFill>
+            </a:endParaRPr>
+          </a:p>
+        </p:txBody>
+      </p:sp>
+      <p:cxnSp>
+        <p:nvCxnSpPr>
+          <p:cNvPr id="6" name="Conector recto de flecha 5">
+            <a:extLst>
+              <a:ext uri="{FF2B5EF4-FFF2-40B4-BE49-F238E27FC236}">
+                <a16:creationId xmlns:a16="http://schemas.microsoft.com/office/drawing/2014/main" id="{BA5D3405-C41D-4D98-5E19-F6DA120F7543}"/>
+              </a:ext>
+            </a:extLst>
+          </p:cNvPr>
+          <p:cNvCxnSpPr>
+            <a:cxnSpLocks/>
+          </p:cNvCxnSpPr>
+          <p:nvPr/>
+        </p:nvCxnSpPr>
+        <p:spPr>
+          <a:xfrm>
+            <a:off x="5892229" y="4060636"/>
+            <a:ext cx="0" cy="927499"/>
+          </a:xfrm>
+          <a:prstGeom prst="straightConnector1">
+            <a:avLst/>
+          </a:prstGeom>
+          <a:ln w="19050">
+            <a:solidFill>
+              <a:schemeClr val="tx1"/>
+            </a:solidFill>
+            <a:tailEnd type="triangle"/>
+          </a:ln>
+        </p:spPr>
+        <p:style>
+          <a:lnRef idx="1">
+            <a:schemeClr val="accent1"/>
+          </a:lnRef>
+          <a:fillRef idx="0">
+            <a:schemeClr val="accent1"/>
+          </a:fillRef>
+          <a:effectRef idx="0">
+            <a:schemeClr val="accent1"/>
+          </a:effectRef>
+          <a:fontRef idx="minor">
+            <a:schemeClr val="tx1"/>
+          </a:fontRef>
+        </p:style>
+      </p:cxnSp>
+      <p:sp>
+        <p:nvSpPr>
+          <p:cNvPr id="14" name="CuadroTexto 13">
+            <a:extLst>
+              <a:ext uri="{FF2B5EF4-FFF2-40B4-BE49-F238E27FC236}">
+                <a16:creationId xmlns:a16="http://schemas.microsoft.com/office/drawing/2014/main" id="{2F93415B-B9AB-5F62-148B-9386A22F0B63}"/>
+              </a:ext>
+            </a:extLst>
+          </p:cNvPr>
+          <p:cNvSpPr txBox="1"/>
+          <p:nvPr/>
+        </p:nvSpPr>
+        <p:spPr>
+          <a:xfrm>
+            <a:off x="3809364" y="4988135"/>
+            <a:ext cx="4389413" cy="646331"/>
+          </a:xfrm>
+          <a:prstGeom prst="rect">
+            <a:avLst/>
+          </a:prstGeom>
+          <a:noFill/>
+        </p:spPr>
+        <p:txBody>
+          <a:bodyPr wrap="square" rtlCol="0">
+            <a:spAutoFit/>
+          </a:bodyPr>
+          <a:lstStyle/>
+          <a:p>
+            <a:r>
+              <a:rPr lang="es-MX" dirty="0"/>
+              <a:t>Los proveedores más conocidos de </a:t>
+            </a:r>
+            <a:r>
+              <a:rPr lang="es-MX" dirty="0" err="1"/>
+              <a:t>LLMs</a:t>
+            </a:r>
+            <a:r>
+              <a:rPr lang="es-MX" dirty="0"/>
+              <a:t> son </a:t>
+            </a:r>
+            <a:r>
+              <a:rPr lang="es-MX" b="1" dirty="0"/>
+              <a:t>Meta, </a:t>
+            </a:r>
+            <a:r>
+              <a:rPr lang="es-MX" b="1" dirty="0" err="1"/>
+              <a:t>OpenAI</a:t>
+            </a:r>
+            <a:r>
+              <a:rPr lang="es-MX" b="1" dirty="0"/>
+              <a:t>, </a:t>
+            </a:r>
+            <a:r>
+              <a:rPr lang="es-MX" b="1" dirty="0" err="1"/>
+              <a:t>Anthropic</a:t>
+            </a:r>
+            <a:r>
+              <a:rPr lang="es-MX" b="1" i="1" dirty="0"/>
+              <a:t>, </a:t>
+            </a:r>
+            <a:r>
+              <a:rPr lang="es-MX" b="1" dirty="0"/>
+              <a:t>Google</a:t>
+            </a:r>
+          </a:p>
+        </p:txBody>
+      </p:sp>
+    </p:spTree>
+    <p:extLst>
+      <p:ext uri="{BB962C8B-B14F-4D97-AF65-F5344CB8AC3E}">
+        <p14:creationId xmlns:p14="http://schemas.microsoft.com/office/powerpoint/2010/main" val="2604394119"/>
+      </p:ext>
+    </p:extLst>
+  </p:cSld>
+  <p:clrMapOvr>
+    <a:masterClrMapping/>
+  </p:clrMapOvr>
+</p:sld>
+</file>
+
+<file path=ppt/slides/slide6.xml><?xml version="1.0" encoding="utf-8"?>
+<p:sld xmlns:a="http://schemas.openxmlformats.org/drawingml/2006/main" xmlns:r="http://schemas.openxmlformats.org/officeDocument/2006/relationships" xmlns:p="http://schemas.openxmlformats.org/presentationml/2006/main">
+  <p:cSld>
+    <p:spTree>
+      <p:nvGrpSpPr>
+        <p:cNvPr id="1" name="">
+          <a:extLst>
+            <a:ext uri="{FF2B5EF4-FFF2-40B4-BE49-F238E27FC236}">
               <a16:creationId xmlns:a16="http://schemas.microsoft.com/office/drawing/2014/main" id="{9E7D39E2-9FF2-6A1E-1922-F99FF4B6CB45}"/>
             </a:ext>
           </a:extLst>
@@ -8484,7 +10419,7 @@
 </p:sld>
 </file>
 
-<file path=ppt/slides/slide5.xml><?xml version="1.0" encoding="utf-8"?>
+<file path=ppt/slides/slide7.xml><?xml version="1.0" encoding="utf-8"?>
 <p:sld xmlns:a="http://schemas.openxmlformats.org/drawingml/2006/main" xmlns:r="http://schemas.openxmlformats.org/officeDocument/2006/relationships" xmlns:p="http://schemas.openxmlformats.org/presentationml/2006/main">
   <p:cSld>
     <p:spTree>
@@ -8683,7 +10618,7 @@
 </p:sld>
 </file>
 
-<file path=ppt/slides/slide6.xml><?xml version="1.0" encoding="utf-8"?>
+<file path=ppt/slides/slide8.xml><?xml version="1.0" encoding="utf-8"?>
 <p:sld xmlns:a="http://schemas.openxmlformats.org/drawingml/2006/main" xmlns:r="http://schemas.openxmlformats.org/officeDocument/2006/relationships" xmlns:p="http://schemas.openxmlformats.org/presentationml/2006/main">
   <p:cSld>
     <p:spTree>
@@ -8825,7 +10760,7 @@
 </p:sld>
 </file>
 
-<file path=ppt/slides/slide7.xml><?xml version="1.0" encoding="utf-8"?>
+<file path=ppt/slides/slide9.xml><?xml version="1.0" encoding="utf-8"?>
 <p:sld xmlns:a="http://schemas.openxmlformats.org/drawingml/2006/main" xmlns:r="http://schemas.openxmlformats.org/officeDocument/2006/relationships" xmlns:p="http://schemas.openxmlformats.org/presentationml/2006/main">
   <p:cSld>
     <p:spTree>
@@ -9079,433 +11014,6 @@
     <p:extLst>
       <p:ext uri="{BB962C8B-B14F-4D97-AF65-F5344CB8AC3E}">
         <p14:creationId xmlns:p14="http://schemas.microsoft.com/office/powerpoint/2010/main" val="1304857153"/>
-      </p:ext>
-    </p:extLst>
-  </p:cSld>
-  <p:clrMapOvr>
-    <a:masterClrMapping/>
-  </p:clrMapOvr>
-</p:sld>
-</file>
-
-<file path=ppt/slides/slide8.xml><?xml version="1.0" encoding="utf-8"?>
-<p:sld xmlns:a="http://schemas.openxmlformats.org/drawingml/2006/main" xmlns:r="http://schemas.openxmlformats.org/officeDocument/2006/relationships" xmlns:p="http://schemas.openxmlformats.org/presentationml/2006/main">
-  <p:cSld>
-    <p:spTree>
-      <p:nvGrpSpPr>
-        <p:cNvPr id="1" name="">
-          <a:extLst>
-            <a:ext uri="{FF2B5EF4-FFF2-40B4-BE49-F238E27FC236}">
-              <a16:creationId xmlns:a16="http://schemas.microsoft.com/office/drawing/2014/main" id="{9869FDF3-09BE-1AB8-3EC0-9C42158B4BF5}"/>
-            </a:ext>
-          </a:extLst>
-        </p:cNvPr>
-        <p:cNvGrpSpPr/>
-        <p:nvPr/>
-      </p:nvGrpSpPr>
-      <p:grpSpPr>
-        <a:xfrm>
-          <a:off x="0" y="0"/>
-          <a:ext cx="0" cy="0"/>
-          <a:chOff x="0" y="0"/>
-          <a:chExt cx="0" cy="0"/>
-        </a:xfrm>
-      </p:grpSpPr>
-      <p:pic>
-        <p:nvPicPr>
-          <p:cNvPr id="4" name="Picture 2" descr="Duoc UC - Learn Chile">
-            <a:extLst>
-              <a:ext uri="{FF2B5EF4-FFF2-40B4-BE49-F238E27FC236}">
-                <a16:creationId xmlns:a16="http://schemas.microsoft.com/office/drawing/2014/main" id="{72A8930F-1822-7455-B419-932B3D79124C}"/>
-              </a:ext>
-            </a:extLst>
-          </p:cNvPr>
-          <p:cNvPicPr>
-            <a:picLocks noChangeAspect="1" noChangeArrowheads="1"/>
-          </p:cNvPicPr>
-          <p:nvPr/>
-        </p:nvPicPr>
-        <p:blipFill>
-          <a:blip r:embed="rId3">
-            <a:extLst>
-              <a:ext uri="{28A0092B-C50C-407E-A947-70E740481C1C}">
-                <a14:useLocalDpi xmlns:a14="http://schemas.microsoft.com/office/drawing/2010/main" val="0"/>
-              </a:ext>
-            </a:extLst>
-          </a:blip>
-          <a:srcRect/>
-          <a:stretch>
-            <a:fillRect/>
-          </a:stretch>
-        </p:blipFill>
-        <p:spPr bwMode="auto">
-          <a:xfrm>
-            <a:off x="11135913" y="30480"/>
-            <a:ext cx="974807" cy="825402"/>
-          </a:xfrm>
-          <a:prstGeom prst="rect">
-            <a:avLst/>
-          </a:prstGeom>
-          <a:noFill/>
-          <a:extLst>
-            <a:ext uri="{909E8E84-426E-40DD-AFC4-6F175D3DCCD1}">
-              <a14:hiddenFill xmlns:a14="http://schemas.microsoft.com/office/drawing/2010/main">
-                <a:solidFill>
-                  <a:srgbClr val="FFFFFF"/>
-                </a:solidFill>
-              </a14:hiddenFill>
-            </a:ext>
-          </a:extLst>
-        </p:spPr>
-      </p:pic>
-      <p:cxnSp>
-        <p:nvCxnSpPr>
-          <p:cNvPr id="5" name="Conector recto de flecha 4">
-            <a:extLst>
-              <a:ext uri="{FF2B5EF4-FFF2-40B4-BE49-F238E27FC236}">
-                <a16:creationId xmlns:a16="http://schemas.microsoft.com/office/drawing/2014/main" id="{F00FB54E-34D5-66B4-CA62-2D6A3F706930}"/>
-              </a:ext>
-            </a:extLst>
-          </p:cNvPr>
-          <p:cNvCxnSpPr/>
-          <p:nvPr/>
-        </p:nvCxnSpPr>
-        <p:spPr>
-          <a:xfrm>
-            <a:off x="4033520" y="3545840"/>
-            <a:ext cx="2611120" cy="1198880"/>
-          </a:xfrm>
-          <a:prstGeom prst="straightConnector1">
-            <a:avLst/>
-          </a:prstGeom>
-          <a:ln w="38100">
-            <a:solidFill>
-              <a:schemeClr val="tx1"/>
-            </a:solidFill>
-            <a:tailEnd type="triangle"/>
-          </a:ln>
-        </p:spPr>
-        <p:style>
-          <a:lnRef idx="1">
-            <a:schemeClr val="accent1"/>
-          </a:lnRef>
-          <a:fillRef idx="0">
-            <a:schemeClr val="accent1"/>
-          </a:fillRef>
-          <a:effectRef idx="0">
-            <a:schemeClr val="accent1"/>
-          </a:effectRef>
-          <a:fontRef idx="minor">
-            <a:schemeClr val="tx1"/>
-          </a:fontRef>
-        </p:style>
-      </p:cxnSp>
-      <p:sp>
-        <p:nvSpPr>
-          <p:cNvPr id="6" name="Título 1">
-            <a:extLst>
-              <a:ext uri="{FF2B5EF4-FFF2-40B4-BE49-F238E27FC236}">
-                <a16:creationId xmlns:a16="http://schemas.microsoft.com/office/drawing/2014/main" id="{8089AB0F-C3E5-E4BD-55D8-E8A91BBA79F0}"/>
-              </a:ext>
-            </a:extLst>
-          </p:cNvPr>
-          <p:cNvSpPr txBox="1">
-            <a:spLocks/>
-          </p:cNvSpPr>
-          <p:nvPr/>
-        </p:nvSpPr>
-        <p:spPr>
-          <a:xfrm>
-            <a:off x="6852920" y="4081938"/>
-            <a:ext cx="10515600" cy="1325563"/>
-          </a:xfrm>
-          <a:prstGeom prst="rect">
-            <a:avLst/>
-          </a:prstGeom>
-        </p:spPr>
-        <p:txBody>
-          <a:bodyPr vert="horz" lIns="91440" tIns="45720" rIns="91440" bIns="45720" rtlCol="0" anchor="ctr">
-            <a:noAutofit/>
-          </a:bodyPr>
-          <a:lstStyle>
-            <a:lvl1pPr algn="l" defTabSz="914400" rtl="0" eaLnBrk="1" latinLnBrk="0" hangingPunct="1">
-              <a:lnSpc>
-                <a:spcPct val="90000"/>
-              </a:lnSpc>
-              <a:spcBef>
-                <a:spcPct val="0"/>
-              </a:spcBef>
-              <a:buNone/>
-              <a:defRPr sz="4400" kern="1200">
-                <a:solidFill>
-                  <a:schemeClr val="tx1"/>
-                </a:solidFill>
-                <a:latin typeface="+mj-lt"/>
-                <a:ea typeface="+mj-ea"/>
-                <a:cs typeface="+mj-cs"/>
-              </a:defRPr>
-            </a:lvl1pPr>
-          </a:lstStyle>
-          <a:p>
-            <a:r>
-              <a:rPr lang="es-CL" sz="3600" i="1" dirty="0"/>
-              <a:t>¿Es la solución perfecta?</a:t>
-            </a:r>
-          </a:p>
-        </p:txBody>
-      </p:sp>
-      <p:sp>
-        <p:nvSpPr>
-          <p:cNvPr id="3" name="Título 1">
-            <a:extLst>
-              <a:ext uri="{FF2B5EF4-FFF2-40B4-BE49-F238E27FC236}">
-                <a16:creationId xmlns:a16="http://schemas.microsoft.com/office/drawing/2014/main" id="{B221EEEA-9C05-EEE1-C27E-326A96503126}"/>
-              </a:ext>
-            </a:extLst>
-          </p:cNvPr>
-          <p:cNvSpPr txBox="1">
-            <a:spLocks/>
-          </p:cNvSpPr>
-          <p:nvPr/>
-        </p:nvSpPr>
-        <p:spPr>
-          <a:xfrm>
-            <a:off x="7490874" y="4744719"/>
-            <a:ext cx="10515600" cy="1325563"/>
-          </a:xfrm>
-          <a:prstGeom prst="rect">
-            <a:avLst/>
-          </a:prstGeom>
-        </p:spPr>
-        <p:txBody>
-          <a:bodyPr vert="horz" lIns="91440" tIns="45720" rIns="91440" bIns="45720" rtlCol="0" anchor="ctr">
-            <a:noAutofit/>
-          </a:bodyPr>
-          <a:lstStyle>
-            <a:lvl1pPr algn="l" defTabSz="914400" rtl="0" eaLnBrk="1" latinLnBrk="0" hangingPunct="1">
-              <a:lnSpc>
-                <a:spcPct val="90000"/>
-              </a:lnSpc>
-              <a:spcBef>
-                <a:spcPct val="0"/>
-              </a:spcBef>
-              <a:buNone/>
-              <a:defRPr sz="4400" kern="1200">
-                <a:solidFill>
-                  <a:schemeClr val="tx1"/>
-                </a:solidFill>
-                <a:latin typeface="+mj-lt"/>
-                <a:ea typeface="+mj-ea"/>
-                <a:cs typeface="+mj-cs"/>
-              </a:defRPr>
-            </a:lvl1pPr>
-          </a:lstStyle>
-          <a:p>
-            <a:r>
-              <a:rPr lang="es-CL" sz="3600" i="1" dirty="0"/>
-              <a:t>No, pero ayuda.</a:t>
-            </a:r>
-          </a:p>
-        </p:txBody>
-      </p:sp>
-      <p:sp>
-        <p:nvSpPr>
-          <p:cNvPr id="10" name="Título 1">
-            <a:extLst>
-              <a:ext uri="{FF2B5EF4-FFF2-40B4-BE49-F238E27FC236}">
-                <a16:creationId xmlns:a16="http://schemas.microsoft.com/office/drawing/2014/main" id="{5EA02DBA-441B-1A94-F9CC-A494815C2334}"/>
-              </a:ext>
-            </a:extLst>
-          </p:cNvPr>
-          <p:cNvSpPr txBox="1">
-            <a:spLocks/>
-          </p:cNvSpPr>
-          <p:nvPr/>
-        </p:nvSpPr>
-        <p:spPr>
-          <a:xfrm>
-            <a:off x="691433" y="1912016"/>
-            <a:ext cx="10515600" cy="1325563"/>
-          </a:xfrm>
-          <a:prstGeom prst="rect">
-            <a:avLst/>
-          </a:prstGeom>
-        </p:spPr>
-        <p:txBody>
-          <a:bodyPr vert="horz" lIns="91440" tIns="45720" rIns="91440" bIns="45720" rtlCol="0" anchor="ctr">
-            <a:noAutofit/>
-          </a:bodyPr>
-          <a:lstStyle>
-            <a:lvl1pPr algn="l" defTabSz="914400" rtl="0" eaLnBrk="1" latinLnBrk="0" hangingPunct="1">
-              <a:lnSpc>
-                <a:spcPct val="90000"/>
-              </a:lnSpc>
-              <a:spcBef>
-                <a:spcPct val="0"/>
-              </a:spcBef>
-              <a:buNone/>
-              <a:defRPr sz="4400" kern="1200">
-                <a:solidFill>
-                  <a:schemeClr val="tx1"/>
-                </a:solidFill>
-                <a:latin typeface="+mj-lt"/>
-                <a:ea typeface="+mj-ea"/>
-                <a:cs typeface="+mj-cs"/>
-              </a:defRPr>
-            </a:lvl1pPr>
-          </a:lstStyle>
-          <a:p>
-            <a:r>
-              <a:rPr lang="es-CL" sz="4000" b="1" i="1"/>
-              <a:t>Prompt Engineering </a:t>
-            </a:r>
-            <a:r>
-              <a:rPr lang="es-CL" sz="3600" i="1"/>
-              <a:t>es una técnica para mejorar las respuestas de los modelos, buscando consistencia, reducción de alucinaciones y personalización de los LLMs.</a:t>
-            </a:r>
-            <a:endParaRPr lang="es-CL" sz="3600" i="1" dirty="0"/>
-          </a:p>
-        </p:txBody>
-      </p:sp>
-    </p:spTree>
-    <p:extLst>
-      <p:ext uri="{BB962C8B-B14F-4D97-AF65-F5344CB8AC3E}">
-        <p14:creationId xmlns:p14="http://schemas.microsoft.com/office/powerpoint/2010/main" val="4135010020"/>
-      </p:ext>
-    </p:extLst>
-  </p:cSld>
-  <p:clrMapOvr>
-    <a:masterClrMapping/>
-  </p:clrMapOvr>
-</p:sld>
-</file>
-
-<file path=ppt/slides/slide9.xml><?xml version="1.0" encoding="utf-8"?>
-<p:sld xmlns:a="http://schemas.openxmlformats.org/drawingml/2006/main" xmlns:r="http://schemas.openxmlformats.org/officeDocument/2006/relationships" xmlns:p="http://schemas.openxmlformats.org/presentationml/2006/main">
-  <p:cSld>
-    <p:spTree>
-      <p:nvGrpSpPr>
-        <p:cNvPr id="1" name="">
-          <a:extLst>
-            <a:ext uri="{FF2B5EF4-FFF2-40B4-BE49-F238E27FC236}">
-              <a16:creationId xmlns:a16="http://schemas.microsoft.com/office/drawing/2014/main" id="{57AA97FD-2191-E9AA-3D7F-CD2F37404C12}"/>
-            </a:ext>
-          </a:extLst>
-        </p:cNvPr>
-        <p:cNvGrpSpPr/>
-        <p:nvPr/>
-      </p:nvGrpSpPr>
-      <p:grpSpPr>
-        <a:xfrm>
-          <a:off x="0" y="0"/>
-          <a:ext cx="0" cy="0"/>
-          <a:chOff x="0" y="0"/>
-          <a:chExt cx="0" cy="0"/>
-        </a:xfrm>
-      </p:grpSpPr>
-      <p:sp>
-        <p:nvSpPr>
-          <p:cNvPr id="2" name="Título 1">
-            <a:extLst>
-              <a:ext uri="{FF2B5EF4-FFF2-40B4-BE49-F238E27FC236}">
-                <a16:creationId xmlns:a16="http://schemas.microsoft.com/office/drawing/2014/main" id="{4AA56AF0-4894-BD4E-ED99-0933E6ADF2C0}"/>
-              </a:ext>
-            </a:extLst>
-          </p:cNvPr>
-          <p:cNvSpPr>
-            <a:spLocks noGrp="1"/>
-          </p:cNvSpPr>
-          <p:nvPr>
-            <p:ph type="title"/>
-          </p:nvPr>
-        </p:nvSpPr>
-        <p:spPr>
-          <a:xfrm>
-            <a:off x="1351280" y="2471875"/>
-            <a:ext cx="10515600" cy="1325563"/>
-          </a:xfrm>
-        </p:spPr>
-        <p:txBody>
-          <a:bodyPr>
-            <a:noAutofit/>
-          </a:bodyPr>
-          <a:lstStyle/>
-          <a:p>
-            <a:r>
-              <a:rPr lang="es-CL" sz="3600" i="1" dirty="0"/>
-              <a:t>¿Cuáles son las técnicas de </a:t>
-            </a:r>
-            <a:r>
-              <a:rPr lang="es-CL" sz="3600" i="1" dirty="0" err="1"/>
-              <a:t>Prompt</a:t>
-            </a:r>
-            <a:r>
-              <a:rPr lang="es-CL" sz="3600" i="1" dirty="0"/>
-              <a:t> </a:t>
-            </a:r>
-            <a:r>
-              <a:rPr lang="es-CL" sz="3600" i="1" dirty="0" err="1"/>
-              <a:t>Engineering</a:t>
-            </a:r>
-            <a:r>
-              <a:rPr lang="es-CL" sz="3600" i="1" dirty="0"/>
-              <a:t>?</a:t>
-            </a:r>
-            <a:endParaRPr lang="es-CL" sz="3600" b="1" i="1" dirty="0"/>
-          </a:p>
-        </p:txBody>
-      </p:sp>
-      <p:pic>
-        <p:nvPicPr>
-          <p:cNvPr id="4" name="Picture 2" descr="Duoc UC - Learn Chile">
-            <a:extLst>
-              <a:ext uri="{FF2B5EF4-FFF2-40B4-BE49-F238E27FC236}">
-                <a16:creationId xmlns:a16="http://schemas.microsoft.com/office/drawing/2014/main" id="{F10E2652-E8AB-542F-F375-D5A600D6FC8F}"/>
-              </a:ext>
-            </a:extLst>
-          </p:cNvPr>
-          <p:cNvPicPr>
-            <a:picLocks noChangeAspect="1" noChangeArrowheads="1"/>
-          </p:cNvPicPr>
-          <p:nvPr/>
-        </p:nvPicPr>
-        <p:blipFill>
-          <a:blip r:embed="rId2">
-            <a:extLst>
-              <a:ext uri="{28A0092B-C50C-407E-A947-70E740481C1C}">
-                <a14:useLocalDpi xmlns:a14="http://schemas.microsoft.com/office/drawing/2010/main" val="0"/>
-              </a:ext>
-            </a:extLst>
-          </a:blip>
-          <a:srcRect/>
-          <a:stretch>
-            <a:fillRect/>
-          </a:stretch>
-        </p:blipFill>
-        <p:spPr bwMode="auto">
-          <a:xfrm>
-            <a:off x="11135913" y="30480"/>
-            <a:ext cx="974807" cy="825402"/>
-          </a:xfrm>
-          <a:prstGeom prst="rect">
-            <a:avLst/>
-          </a:prstGeom>
-          <a:noFill/>
-          <a:extLst>
-            <a:ext uri="{909E8E84-426E-40DD-AFC4-6F175D3DCCD1}">
-              <a14:hiddenFill xmlns:a14="http://schemas.microsoft.com/office/drawing/2010/main">
-                <a:solidFill>
-                  <a:srgbClr val="FFFFFF"/>
-                </a:solidFill>
-              </a14:hiddenFill>
-            </a:ext>
-          </a:extLst>
-        </p:spPr>
-      </p:pic>
-    </p:spTree>
-    <p:extLst>
-      <p:ext uri="{BB962C8B-B14F-4D97-AF65-F5344CB8AC3E}">
-        <p14:creationId xmlns:p14="http://schemas.microsoft.com/office/powerpoint/2010/main" val="2873179610"/>
       </p:ext>
     </p:extLst>
   </p:cSld>
